--- a/fundamentals/notes/Notes.pptx
+++ b/fundamentals/notes/Notes.pptx
@@ -12,6 +12,7 @@
     <p:sldId id="257" r:id="rId7"/>
     <p:sldId id="258" r:id="rId8"/>
     <p:sldId id="259" r:id="rId9"/>
+    <p:sldId id="260" r:id="rId10"/>
   </p:sldIdLst>
   <p:sldSz cy="5143500" cx="9144000"/>
   <p:notesSz cx="6858000" cy="9144000"/>
@@ -1041,6 +1042,105 @@
       <p:sp>
         <p:nvSpPr>
           <p:cNvPr id="70" name="Google Shape;70;g3dce7d8d330_0_12:notes"/>
+          <p:cNvSpPr txBox="1"/>
+          <p:nvPr>
+            <p:ph idx="1" type="body"/>
+          </p:nvPr>
+        </p:nvSpPr>
+        <p:spPr>
+          <a:xfrm>
+            <a:off x="685800" y="4343400"/>
+            <a:ext cx="5486400" cy="4114800"/>
+          </a:xfrm>
+          <a:prstGeom prst="rect">
+            <a:avLst/>
+          </a:prstGeom>
+        </p:spPr>
+        <p:txBody>
+          <a:bodyPr anchorCtr="0" anchor="t" bIns="91425" lIns="91425" spcFirstLastPara="1" rIns="91425" wrap="square" tIns="91425">
+            <a:noAutofit/>
+          </a:bodyPr>
+          <a:lstStyle/>
+          <a:p>
+            <a:pPr indent="0" lvl="0" marL="0" rtl="0" algn="l">
+              <a:spcBef>
+                <a:spcPts val="0"/>
+              </a:spcBef>
+              <a:spcAft>
+                <a:spcPts val="0"/>
+              </a:spcAft>
+              <a:buNone/>
+            </a:pPr>
+            <a:r>
+              <a:t/>
+            </a:r>
+            <a:endParaRPr/>
+          </a:p>
+        </p:txBody>
+      </p:sp>
+    </p:spTree>
+  </p:cSld>
+  <p:clrMapOvr>
+    <a:masterClrMapping/>
+  </p:clrMapOvr>
+</p:notes>
+</file>
+
+<file path=ppt/notesSlides/notesSlide5.xml><?xml version="1.0" encoding="utf-8"?>
+<p:notes xmlns:a="http://schemas.openxmlformats.org/drawingml/2006/main" xmlns:r="http://schemas.openxmlformats.org/officeDocument/2006/relationships" xmlns:mc="http://schemas.openxmlformats.org/markup-compatibility/2006" xmlns:mv="urn:schemas-microsoft-com:mac:vml" xmlns:p="http://schemas.openxmlformats.org/presentationml/2006/main" xmlns:c="http://schemas.openxmlformats.org/drawingml/2006/chart" xmlns:dgm="http://schemas.openxmlformats.org/drawingml/2006/diagram" xmlns:o="urn:schemas-microsoft-com:office:office" xmlns:v="urn:schemas-microsoft-com:vml" xmlns:pvml="urn:schemas-microsoft-com:office:powerpoint" xmlns:com="http://schemas.openxmlformats.org/drawingml/2006/compatibility" xmlns:p14="http://schemas.microsoft.com/office/powerpoint/2010/main" xmlns:p15="http://schemas.microsoft.com/office/powerpoint/2012/main" xmlns:ahyp="http://schemas.microsoft.com/office/drawing/2018/hyperlinkcolor" showMasterPhAnim="0" showMasterSp="0">
+  <p:cSld>
+    <p:spTree>
+      <p:nvGrpSpPr>
+        <p:cNvPr id="74" name="Shape 74"/>
+        <p:cNvGrpSpPr/>
+        <p:nvPr/>
+      </p:nvGrpSpPr>
+      <p:grpSpPr>
+        <a:xfrm>
+          <a:off x="0" y="0"/>
+          <a:ext cx="0" cy="0"/>
+          <a:chOff x="0" y="0"/>
+          <a:chExt cx="0" cy="0"/>
+        </a:xfrm>
+      </p:grpSpPr>
+      <p:sp>
+        <p:nvSpPr>
+          <p:cNvPr id="75" name="Google Shape;75;g3dcfae2e2ef_0_1:notes"/>
+          <p:cNvSpPr/>
+          <p:nvPr>
+            <p:ph idx="2" type="sldImg"/>
+          </p:nvPr>
+        </p:nvSpPr>
+        <p:spPr>
+          <a:xfrm>
+            <a:off x="381300" y="685800"/>
+            <a:ext cx="6096000" cy="3429000"/>
+          </a:xfrm>
+          <a:custGeom>
+            <a:rect b="b" l="l" r="r" t="t"/>
+            <a:pathLst>
+              <a:path extrusionOk="0" h="120000" w="120000">
+                <a:moveTo>
+                  <a:pt x="0" y="0"/>
+                </a:moveTo>
+                <a:lnTo>
+                  <a:pt x="120000" y="0"/>
+                </a:lnTo>
+                <a:lnTo>
+                  <a:pt x="120000" y="120000"/>
+                </a:lnTo>
+                <a:lnTo>
+                  <a:pt x="0" y="120000"/>
+                </a:lnTo>
+                <a:close/>
+              </a:path>
+            </a:pathLst>
+          </a:custGeom>
+        </p:spPr>
+      </p:sp>
+      <p:sp>
+        <p:nvSpPr>
+          <p:cNvPr id="76" name="Google Shape;76;g3dcfae2e2ef_0_1:notes"/>
           <p:cNvSpPr txBox="1"/>
           <p:nvPr>
             <p:ph idx="1" type="body"/>
@@ -6185,6 +6285,126 @@
           </a:p>
         </p:txBody>
       </p:sp>
+      <p:pic>
+        <p:nvPicPr>
+          <p:cNvPr id="73" name="Google Shape;73;p16"/>
+          <p:cNvPicPr preferRelativeResize="0"/>
+          <p:nvPr/>
+        </p:nvPicPr>
+        <p:blipFill>
+          <a:blip r:embed="rId3">
+            <a:alphaModFix/>
+          </a:blip>
+          <a:stretch>
+            <a:fillRect/>
+          </a:stretch>
+        </p:blipFill>
+        <p:spPr>
+          <a:xfrm>
+            <a:off x="57150" y="294300"/>
+            <a:ext cx="9029700" cy="4239601"/>
+          </a:xfrm>
+          <a:prstGeom prst="rect">
+            <a:avLst/>
+          </a:prstGeom>
+          <a:noFill/>
+          <a:ln>
+            <a:noFill/>
+          </a:ln>
+        </p:spPr>
+      </p:pic>
+    </p:spTree>
+  </p:cSld>
+  <p:clrMapOvr>
+    <a:masterClrMapping/>
+  </p:clrMapOvr>
+</p:sld>
+</file>
+
+<file path=ppt/slides/slide5.xml><?xml version="1.0" encoding="utf-8"?>
+<p:sld xmlns:a="http://schemas.openxmlformats.org/drawingml/2006/main" xmlns:r="http://schemas.openxmlformats.org/officeDocument/2006/relationships" xmlns:mc="http://schemas.openxmlformats.org/markup-compatibility/2006" xmlns:mv="urn:schemas-microsoft-com:mac:vml" xmlns:p="http://schemas.openxmlformats.org/presentationml/2006/main" xmlns:c="http://schemas.openxmlformats.org/drawingml/2006/chart" xmlns:dgm="http://schemas.openxmlformats.org/drawingml/2006/diagram" xmlns:o="urn:schemas-microsoft-com:office:office" xmlns:v="urn:schemas-microsoft-com:vml" xmlns:pvml="urn:schemas-microsoft-com:office:powerpoint" xmlns:com="http://schemas.openxmlformats.org/drawingml/2006/compatibility" xmlns:p14="http://schemas.microsoft.com/office/powerpoint/2010/main" xmlns:p15="http://schemas.microsoft.com/office/powerpoint/2012/main" xmlns:ahyp="http://schemas.microsoft.com/office/drawing/2018/hyperlinkcolor">
+  <p:cSld>
+    <p:spTree>
+      <p:nvGrpSpPr>
+        <p:cNvPr id="77" name="Shape 77"/>
+        <p:cNvGrpSpPr/>
+        <p:nvPr/>
+      </p:nvGrpSpPr>
+      <p:grpSpPr>
+        <a:xfrm>
+          <a:off x="0" y="0"/>
+          <a:ext cx="0" cy="0"/>
+          <a:chOff x="0" y="0"/>
+          <a:chExt cx="0" cy="0"/>
+        </a:xfrm>
+      </p:grpSpPr>
+      <p:sp>
+        <p:nvSpPr>
+          <p:cNvPr id="78" name="Google Shape;78;p17"/>
+          <p:cNvSpPr txBox="1"/>
+          <p:nvPr>
+            <p:ph idx="1" type="body"/>
+          </p:nvPr>
+        </p:nvSpPr>
+        <p:spPr>
+          <a:xfrm>
+            <a:off x="311700" y="383325"/>
+            <a:ext cx="8520600" cy="4185600"/>
+          </a:xfrm>
+          <a:prstGeom prst="rect">
+            <a:avLst/>
+          </a:prstGeom>
+        </p:spPr>
+        <p:txBody>
+          <a:bodyPr anchorCtr="0" anchor="t" bIns="91425" lIns="91425" spcFirstLastPara="1" rIns="91425" wrap="square" tIns="91425">
+            <a:normAutofit/>
+          </a:bodyPr>
+          <a:lstStyle/>
+          <a:p>
+            <a:pPr indent="0" lvl="0" marL="0" rtl="0" algn="l">
+              <a:spcBef>
+                <a:spcPts val="0"/>
+              </a:spcBef>
+              <a:spcAft>
+                <a:spcPts val="1200"/>
+              </a:spcAft>
+              <a:buNone/>
+            </a:pPr>
+            <a:r>
+              <a:t/>
+            </a:r>
+            <a:endParaRPr/>
+          </a:p>
+        </p:txBody>
+      </p:sp>
+      <p:pic>
+        <p:nvPicPr>
+          <p:cNvPr id="79" name="Google Shape;79;p17"/>
+          <p:cNvPicPr preferRelativeResize="0"/>
+          <p:nvPr/>
+        </p:nvPicPr>
+        <p:blipFill>
+          <a:blip r:embed="rId3">
+            <a:alphaModFix/>
+          </a:blip>
+          <a:stretch>
+            <a:fillRect/>
+          </a:stretch>
+        </p:blipFill>
+        <p:spPr>
+          <a:xfrm>
+            <a:off x="0" y="383325"/>
+            <a:ext cx="9144001" cy="4149724"/>
+          </a:xfrm>
+          <a:prstGeom prst="rect">
+            <a:avLst/>
+          </a:prstGeom>
+          <a:noFill/>
+          <a:ln>
+            <a:noFill/>
+          </a:ln>
+        </p:spPr>
+      </p:pic>
     </p:spTree>
   </p:cSld>
   <p:clrMapOvr>

--- a/fundamentals/notes/Notes.pptx
+++ b/fundamentals/notes/Notes.pptx
@@ -1,6 +1,6 @@
 
 <file path=ppt/presentation.xml><?xml version="1.0" encoding="utf-8"?>
-<p:presentation xmlns:a="http://schemas.openxmlformats.org/drawingml/2006/main" xmlns:r="http://schemas.openxmlformats.org/officeDocument/2006/relationships" xmlns:mc="http://schemas.openxmlformats.org/markup-compatibility/2006" xmlns:mv="urn:schemas-microsoft-com:mac:vml" xmlns:p="http://schemas.openxmlformats.org/presentationml/2006/main" xmlns:c="http://schemas.openxmlformats.org/drawingml/2006/chart" xmlns:dgm="http://schemas.openxmlformats.org/drawingml/2006/diagram" xmlns:o="urn:schemas-microsoft-com:office:office" xmlns:v="urn:schemas-microsoft-com:vml" xmlns:pvml="urn:schemas-microsoft-com:office:powerpoint" xmlns:com="http://schemas.openxmlformats.org/drawingml/2006/compatibility" xmlns:p14="http://schemas.microsoft.com/office/powerpoint/2010/main" xmlns:p15="http://schemas.microsoft.com/office/powerpoint/2012/main" xmlns:ahyp="http://schemas.microsoft.com/office/drawing/2018/hyperlinkcolor" autoCompressPictures="0" strictFirstAndLastChars="0" saveSubsetFonts="1">
+<p:presentation xmlns:a="http://schemas.openxmlformats.org/drawingml/2006/main" xmlns:r="http://schemas.openxmlformats.org/officeDocument/2006/relationships" xmlns:mc="http://schemas.openxmlformats.org/markup-compatibility/2006" xmlns:mv="urn:schemas-microsoft-com:mac:vml" xmlns:p="http://schemas.openxmlformats.org/presentationml/2006/main" xmlns:c="http://schemas.openxmlformats.org/drawingml/2006/chart" xmlns:dgm="http://schemas.openxmlformats.org/drawingml/2006/diagram" xmlns:o="urn:schemas-microsoft-com:office:office" xmlns:v="urn:schemas-microsoft-com:vml" xmlns:pvml="urn:schemas-microsoft-com:office:powerpoint" xmlns:com="http://schemas.openxmlformats.org/drawingml/2006/compatibility" xmlns:p14="http://schemas.microsoft.com/office/powerpoint/2010/main" xmlns:p15="http://schemas.microsoft.com/office/powerpoint/2012/main" xmlns:ahyp="http://schemas.microsoft.com/office/drawing/2018/hyperlinkcolor" autoCompressPictures="0" embedTrueTypeFonts="1" strictFirstAndLastChars="0" saveSubsetFonts="1">
   <p:sldMasterIdLst>
     <p:sldMasterId id="2147483659" r:id="rId4"/>
   </p:sldMasterIdLst>
@@ -13,9 +13,32 @@
     <p:sldId id="258" r:id="rId8"/>
     <p:sldId id="259" r:id="rId9"/>
     <p:sldId id="260" r:id="rId10"/>
+    <p:sldId id="261" r:id="rId11"/>
+    <p:sldId id="262" r:id="rId12"/>
+    <p:sldId id="263" r:id="rId13"/>
+    <p:sldId id="264" r:id="rId14"/>
+    <p:sldId id="265" r:id="rId15"/>
+    <p:sldId id="266" r:id="rId16"/>
+    <p:sldId id="267" r:id="rId17"/>
+    <p:sldId id="268" r:id="rId18"/>
+    <p:sldId id="269" r:id="rId19"/>
+    <p:sldId id="270" r:id="rId20"/>
+    <p:sldId id="271" r:id="rId21"/>
+    <p:sldId id="272" r:id="rId22"/>
+    <p:sldId id="273" r:id="rId23"/>
+    <p:sldId id="274" r:id="rId24"/>
   </p:sldIdLst>
   <p:sldSz cy="5143500" cx="9144000"/>
   <p:notesSz cx="6858000" cy="9144000"/>
+  <p:embeddedFontLst>
+    <p:embeddedFont>
+      <p:font typeface="Roboto Mono"/>
+      <p:regular r:id="rId25"/>
+      <p:bold r:id="rId26"/>
+      <p:italic r:id="rId27"/>
+      <p:boldItalic r:id="rId28"/>
+    </p:embeddedFont>
+  </p:embeddedFontLst>
   <p:defaultTextStyle>
     <a:defPPr lvl="0" marR="0" rtl="0" algn="l">
       <a:lnSpc>
@@ -789,12 +812,12 @@
 </p:notes>
 </file>
 
-<file path=ppt/notesSlides/notesSlide2.xml><?xml version="1.0" encoding="utf-8"?>
+<file path=ppt/notesSlides/notesSlide10.xml><?xml version="1.0" encoding="utf-8"?>
 <p:notes xmlns:a="http://schemas.openxmlformats.org/drawingml/2006/main" xmlns:r="http://schemas.openxmlformats.org/officeDocument/2006/relationships" xmlns:mc="http://schemas.openxmlformats.org/markup-compatibility/2006" xmlns:mv="urn:schemas-microsoft-com:mac:vml" xmlns:p="http://schemas.openxmlformats.org/presentationml/2006/main" xmlns:c="http://schemas.openxmlformats.org/drawingml/2006/chart" xmlns:dgm="http://schemas.openxmlformats.org/drawingml/2006/diagram" xmlns:o="urn:schemas-microsoft-com:office:office" xmlns:v="urn:schemas-microsoft-com:vml" xmlns:pvml="urn:schemas-microsoft-com:office:powerpoint" xmlns:com="http://schemas.openxmlformats.org/drawingml/2006/compatibility" xmlns:p14="http://schemas.microsoft.com/office/powerpoint/2010/main" xmlns:p15="http://schemas.microsoft.com/office/powerpoint/2012/main" xmlns:ahyp="http://schemas.microsoft.com/office/drawing/2018/hyperlinkcolor" showMasterPhAnim="0" showMasterSp="0">
   <p:cSld>
     <p:spTree>
       <p:nvGrpSpPr>
-        <p:cNvPr id="55" name="Shape 55"/>
+        <p:cNvPr id="105" name="Shape 105"/>
         <p:cNvGrpSpPr/>
         <p:nvPr/>
       </p:nvGrpSpPr>
@@ -808,7 +831,7 @@
       </p:grpSpPr>
       <p:sp>
         <p:nvSpPr>
-          <p:cNvPr id="56" name="Google Shape;56;g3dce7d8d330_0_0:notes"/>
+          <p:cNvPr id="106" name="Google Shape;106;g3d4479ca5a0_0_0:notes"/>
           <p:cNvSpPr/>
           <p:nvPr>
             <p:ph idx="2" type="sldImg"/>
@@ -843,7 +866,997 @@
       </p:sp>
       <p:sp>
         <p:nvSpPr>
-          <p:cNvPr id="57" name="Google Shape;57;g3dce7d8d330_0_0:notes"/>
+          <p:cNvPr id="107" name="Google Shape;107;g3d4479ca5a0_0_0:notes"/>
+          <p:cNvSpPr txBox="1"/>
+          <p:nvPr>
+            <p:ph idx="1" type="body"/>
+          </p:nvPr>
+        </p:nvSpPr>
+        <p:spPr>
+          <a:xfrm>
+            <a:off x="685800" y="4343400"/>
+            <a:ext cx="5486400" cy="4114800"/>
+          </a:xfrm>
+          <a:prstGeom prst="rect">
+            <a:avLst/>
+          </a:prstGeom>
+        </p:spPr>
+        <p:txBody>
+          <a:bodyPr anchorCtr="0" anchor="t" bIns="91425" lIns="91425" spcFirstLastPara="1" rIns="91425" wrap="square" tIns="91425">
+            <a:noAutofit/>
+          </a:bodyPr>
+          <a:lstStyle/>
+          <a:p>
+            <a:pPr indent="0" lvl="0" marL="0" rtl="0" algn="l">
+              <a:spcBef>
+                <a:spcPts val="0"/>
+              </a:spcBef>
+              <a:spcAft>
+                <a:spcPts val="0"/>
+              </a:spcAft>
+              <a:buNone/>
+            </a:pPr>
+            <a:r>
+              <a:t/>
+            </a:r>
+            <a:endParaRPr/>
+          </a:p>
+        </p:txBody>
+      </p:sp>
+    </p:spTree>
+  </p:cSld>
+  <p:clrMapOvr>
+    <a:masterClrMapping/>
+  </p:clrMapOvr>
+</p:notes>
+</file>
+
+<file path=ppt/notesSlides/notesSlide11.xml><?xml version="1.0" encoding="utf-8"?>
+<p:notes xmlns:a="http://schemas.openxmlformats.org/drawingml/2006/main" xmlns:r="http://schemas.openxmlformats.org/officeDocument/2006/relationships" xmlns:mc="http://schemas.openxmlformats.org/markup-compatibility/2006" xmlns:mv="urn:schemas-microsoft-com:mac:vml" xmlns:p="http://schemas.openxmlformats.org/presentationml/2006/main" xmlns:c="http://schemas.openxmlformats.org/drawingml/2006/chart" xmlns:dgm="http://schemas.openxmlformats.org/drawingml/2006/diagram" xmlns:o="urn:schemas-microsoft-com:office:office" xmlns:v="urn:schemas-microsoft-com:vml" xmlns:pvml="urn:schemas-microsoft-com:office:powerpoint" xmlns:com="http://schemas.openxmlformats.org/drawingml/2006/compatibility" xmlns:p14="http://schemas.microsoft.com/office/powerpoint/2010/main" xmlns:p15="http://schemas.microsoft.com/office/powerpoint/2012/main" xmlns:ahyp="http://schemas.microsoft.com/office/drawing/2018/hyperlinkcolor" showMasterPhAnim="0" showMasterSp="0">
+  <p:cSld>
+    <p:spTree>
+      <p:nvGrpSpPr>
+        <p:cNvPr id="113" name="Shape 113"/>
+        <p:cNvGrpSpPr/>
+        <p:nvPr/>
+      </p:nvGrpSpPr>
+      <p:grpSpPr>
+        <a:xfrm>
+          <a:off x="0" y="0"/>
+          <a:ext cx="0" cy="0"/>
+          <a:chOff x="0" y="0"/>
+          <a:chExt cx="0" cy="0"/>
+        </a:xfrm>
+      </p:grpSpPr>
+      <p:sp>
+        <p:nvSpPr>
+          <p:cNvPr id="114" name="Google Shape;114;g3d4479ca5a0_0_14:notes"/>
+          <p:cNvSpPr/>
+          <p:nvPr>
+            <p:ph idx="2" type="sldImg"/>
+          </p:nvPr>
+        </p:nvSpPr>
+        <p:spPr>
+          <a:xfrm>
+            <a:off x="381300" y="685800"/>
+            <a:ext cx="6096000" cy="3429000"/>
+          </a:xfrm>
+          <a:custGeom>
+            <a:rect b="b" l="l" r="r" t="t"/>
+            <a:pathLst>
+              <a:path extrusionOk="0" h="120000" w="120000">
+                <a:moveTo>
+                  <a:pt x="0" y="0"/>
+                </a:moveTo>
+                <a:lnTo>
+                  <a:pt x="120000" y="0"/>
+                </a:lnTo>
+                <a:lnTo>
+                  <a:pt x="120000" y="120000"/>
+                </a:lnTo>
+                <a:lnTo>
+                  <a:pt x="0" y="120000"/>
+                </a:lnTo>
+                <a:close/>
+              </a:path>
+            </a:pathLst>
+          </a:custGeom>
+        </p:spPr>
+      </p:sp>
+      <p:sp>
+        <p:nvSpPr>
+          <p:cNvPr id="115" name="Google Shape;115;g3d4479ca5a0_0_14:notes"/>
+          <p:cNvSpPr txBox="1"/>
+          <p:nvPr>
+            <p:ph idx="1" type="body"/>
+          </p:nvPr>
+        </p:nvSpPr>
+        <p:spPr>
+          <a:xfrm>
+            <a:off x="685800" y="4343400"/>
+            <a:ext cx="5486400" cy="4114800"/>
+          </a:xfrm>
+          <a:prstGeom prst="rect">
+            <a:avLst/>
+          </a:prstGeom>
+        </p:spPr>
+        <p:txBody>
+          <a:bodyPr anchorCtr="0" anchor="t" bIns="91425" lIns="91425" spcFirstLastPara="1" rIns="91425" wrap="square" tIns="91425">
+            <a:noAutofit/>
+          </a:bodyPr>
+          <a:lstStyle/>
+          <a:p>
+            <a:pPr indent="0" lvl="0" marL="0" rtl="0" algn="l">
+              <a:spcBef>
+                <a:spcPts val="0"/>
+              </a:spcBef>
+              <a:spcAft>
+                <a:spcPts val="0"/>
+              </a:spcAft>
+              <a:buNone/>
+            </a:pPr>
+            <a:r>
+              <a:t/>
+            </a:r>
+            <a:endParaRPr/>
+          </a:p>
+        </p:txBody>
+      </p:sp>
+    </p:spTree>
+  </p:cSld>
+  <p:clrMapOvr>
+    <a:masterClrMapping/>
+  </p:clrMapOvr>
+</p:notes>
+</file>
+
+<file path=ppt/notesSlides/notesSlide12.xml><?xml version="1.0" encoding="utf-8"?>
+<p:notes xmlns:a="http://schemas.openxmlformats.org/drawingml/2006/main" xmlns:r="http://schemas.openxmlformats.org/officeDocument/2006/relationships" xmlns:mc="http://schemas.openxmlformats.org/markup-compatibility/2006" xmlns:mv="urn:schemas-microsoft-com:mac:vml" xmlns:p="http://schemas.openxmlformats.org/presentationml/2006/main" xmlns:c="http://schemas.openxmlformats.org/drawingml/2006/chart" xmlns:dgm="http://schemas.openxmlformats.org/drawingml/2006/diagram" xmlns:o="urn:schemas-microsoft-com:office:office" xmlns:v="urn:schemas-microsoft-com:vml" xmlns:pvml="urn:schemas-microsoft-com:office:powerpoint" xmlns:com="http://schemas.openxmlformats.org/drawingml/2006/compatibility" xmlns:p14="http://schemas.microsoft.com/office/powerpoint/2010/main" xmlns:p15="http://schemas.microsoft.com/office/powerpoint/2012/main" xmlns:ahyp="http://schemas.microsoft.com/office/drawing/2018/hyperlinkcolor" showMasterPhAnim="0" showMasterSp="0">
+  <p:cSld>
+    <p:spTree>
+      <p:nvGrpSpPr>
+        <p:cNvPr id="122" name="Shape 122"/>
+        <p:cNvGrpSpPr/>
+        <p:nvPr/>
+      </p:nvGrpSpPr>
+      <p:grpSpPr>
+        <a:xfrm>
+          <a:off x="0" y="0"/>
+          <a:ext cx="0" cy="0"/>
+          <a:chOff x="0" y="0"/>
+          <a:chExt cx="0" cy="0"/>
+        </a:xfrm>
+      </p:grpSpPr>
+      <p:sp>
+        <p:nvSpPr>
+          <p:cNvPr id="123" name="Google Shape;123;g3d4479ca5a0_0_23:notes"/>
+          <p:cNvSpPr/>
+          <p:nvPr>
+            <p:ph idx="2" type="sldImg"/>
+          </p:nvPr>
+        </p:nvSpPr>
+        <p:spPr>
+          <a:xfrm>
+            <a:off x="381300" y="685800"/>
+            <a:ext cx="6096000" cy="3429000"/>
+          </a:xfrm>
+          <a:custGeom>
+            <a:rect b="b" l="l" r="r" t="t"/>
+            <a:pathLst>
+              <a:path extrusionOk="0" h="120000" w="120000">
+                <a:moveTo>
+                  <a:pt x="0" y="0"/>
+                </a:moveTo>
+                <a:lnTo>
+                  <a:pt x="120000" y="0"/>
+                </a:lnTo>
+                <a:lnTo>
+                  <a:pt x="120000" y="120000"/>
+                </a:lnTo>
+                <a:lnTo>
+                  <a:pt x="0" y="120000"/>
+                </a:lnTo>
+                <a:close/>
+              </a:path>
+            </a:pathLst>
+          </a:custGeom>
+        </p:spPr>
+      </p:sp>
+      <p:sp>
+        <p:nvSpPr>
+          <p:cNvPr id="124" name="Google Shape;124;g3d4479ca5a0_0_23:notes"/>
+          <p:cNvSpPr txBox="1"/>
+          <p:nvPr>
+            <p:ph idx="1" type="body"/>
+          </p:nvPr>
+        </p:nvSpPr>
+        <p:spPr>
+          <a:xfrm>
+            <a:off x="685800" y="4343400"/>
+            <a:ext cx="5486400" cy="4114800"/>
+          </a:xfrm>
+          <a:prstGeom prst="rect">
+            <a:avLst/>
+          </a:prstGeom>
+        </p:spPr>
+        <p:txBody>
+          <a:bodyPr anchorCtr="0" anchor="t" bIns="91425" lIns="91425" spcFirstLastPara="1" rIns="91425" wrap="square" tIns="91425">
+            <a:noAutofit/>
+          </a:bodyPr>
+          <a:lstStyle/>
+          <a:p>
+            <a:pPr indent="0" lvl="0" marL="0" rtl="0" algn="l">
+              <a:spcBef>
+                <a:spcPts val="0"/>
+              </a:spcBef>
+              <a:spcAft>
+                <a:spcPts val="0"/>
+              </a:spcAft>
+              <a:buNone/>
+            </a:pPr>
+            <a:r>
+              <a:t/>
+            </a:r>
+            <a:endParaRPr/>
+          </a:p>
+        </p:txBody>
+      </p:sp>
+    </p:spTree>
+  </p:cSld>
+  <p:clrMapOvr>
+    <a:masterClrMapping/>
+  </p:clrMapOvr>
+</p:notes>
+</file>
+
+<file path=ppt/notesSlides/notesSlide13.xml><?xml version="1.0" encoding="utf-8"?>
+<p:notes xmlns:a="http://schemas.openxmlformats.org/drawingml/2006/main" xmlns:r="http://schemas.openxmlformats.org/officeDocument/2006/relationships" xmlns:mc="http://schemas.openxmlformats.org/markup-compatibility/2006" xmlns:mv="urn:schemas-microsoft-com:mac:vml" xmlns:p="http://schemas.openxmlformats.org/presentationml/2006/main" xmlns:c="http://schemas.openxmlformats.org/drawingml/2006/chart" xmlns:dgm="http://schemas.openxmlformats.org/drawingml/2006/diagram" xmlns:o="urn:schemas-microsoft-com:office:office" xmlns:v="urn:schemas-microsoft-com:vml" xmlns:pvml="urn:schemas-microsoft-com:office:powerpoint" xmlns:com="http://schemas.openxmlformats.org/drawingml/2006/compatibility" xmlns:p14="http://schemas.microsoft.com/office/powerpoint/2010/main" xmlns:p15="http://schemas.microsoft.com/office/powerpoint/2012/main" xmlns:ahyp="http://schemas.microsoft.com/office/drawing/2018/hyperlinkcolor" showMasterPhAnim="0" showMasterSp="0">
+  <p:cSld>
+    <p:spTree>
+      <p:nvGrpSpPr>
+        <p:cNvPr id="131" name="Shape 131"/>
+        <p:cNvGrpSpPr/>
+        <p:nvPr/>
+      </p:nvGrpSpPr>
+      <p:grpSpPr>
+        <a:xfrm>
+          <a:off x="0" y="0"/>
+          <a:ext cx="0" cy="0"/>
+          <a:chOff x="0" y="0"/>
+          <a:chExt cx="0" cy="0"/>
+        </a:xfrm>
+      </p:grpSpPr>
+      <p:sp>
+        <p:nvSpPr>
+          <p:cNvPr id="132" name="Google Shape;132;g3dcfae2e2ef_0_7:notes"/>
+          <p:cNvSpPr/>
+          <p:nvPr>
+            <p:ph idx="2" type="sldImg"/>
+          </p:nvPr>
+        </p:nvSpPr>
+        <p:spPr>
+          <a:xfrm>
+            <a:off x="381300" y="685800"/>
+            <a:ext cx="6096000" cy="3429000"/>
+          </a:xfrm>
+          <a:custGeom>
+            <a:rect b="b" l="l" r="r" t="t"/>
+            <a:pathLst>
+              <a:path extrusionOk="0" h="120000" w="120000">
+                <a:moveTo>
+                  <a:pt x="0" y="0"/>
+                </a:moveTo>
+                <a:lnTo>
+                  <a:pt x="120000" y="0"/>
+                </a:lnTo>
+                <a:lnTo>
+                  <a:pt x="120000" y="120000"/>
+                </a:lnTo>
+                <a:lnTo>
+                  <a:pt x="0" y="120000"/>
+                </a:lnTo>
+                <a:close/>
+              </a:path>
+            </a:pathLst>
+          </a:custGeom>
+        </p:spPr>
+      </p:sp>
+      <p:sp>
+        <p:nvSpPr>
+          <p:cNvPr id="133" name="Google Shape;133;g3dcfae2e2ef_0_7:notes"/>
+          <p:cNvSpPr txBox="1"/>
+          <p:nvPr>
+            <p:ph idx="1" type="body"/>
+          </p:nvPr>
+        </p:nvSpPr>
+        <p:spPr>
+          <a:xfrm>
+            <a:off x="685800" y="4343400"/>
+            <a:ext cx="5486400" cy="4114800"/>
+          </a:xfrm>
+          <a:prstGeom prst="rect">
+            <a:avLst/>
+          </a:prstGeom>
+        </p:spPr>
+        <p:txBody>
+          <a:bodyPr anchorCtr="0" anchor="t" bIns="91425" lIns="91425" spcFirstLastPara="1" rIns="91425" wrap="square" tIns="91425">
+            <a:noAutofit/>
+          </a:bodyPr>
+          <a:lstStyle/>
+          <a:p>
+            <a:pPr indent="0" lvl="0" marL="0" rtl="0" algn="l">
+              <a:spcBef>
+                <a:spcPts val="0"/>
+              </a:spcBef>
+              <a:spcAft>
+                <a:spcPts val="0"/>
+              </a:spcAft>
+              <a:buNone/>
+            </a:pPr>
+            <a:r>
+              <a:t/>
+            </a:r>
+            <a:endParaRPr/>
+          </a:p>
+        </p:txBody>
+      </p:sp>
+    </p:spTree>
+  </p:cSld>
+  <p:clrMapOvr>
+    <a:masterClrMapping/>
+  </p:clrMapOvr>
+</p:notes>
+</file>
+
+<file path=ppt/notesSlides/notesSlide14.xml><?xml version="1.0" encoding="utf-8"?>
+<p:notes xmlns:a="http://schemas.openxmlformats.org/drawingml/2006/main" xmlns:r="http://schemas.openxmlformats.org/officeDocument/2006/relationships" xmlns:mc="http://schemas.openxmlformats.org/markup-compatibility/2006" xmlns:mv="urn:schemas-microsoft-com:mac:vml" xmlns:p="http://schemas.openxmlformats.org/presentationml/2006/main" xmlns:c="http://schemas.openxmlformats.org/drawingml/2006/chart" xmlns:dgm="http://schemas.openxmlformats.org/drawingml/2006/diagram" xmlns:o="urn:schemas-microsoft-com:office:office" xmlns:v="urn:schemas-microsoft-com:vml" xmlns:pvml="urn:schemas-microsoft-com:office:powerpoint" xmlns:com="http://schemas.openxmlformats.org/drawingml/2006/compatibility" xmlns:p14="http://schemas.microsoft.com/office/powerpoint/2010/main" xmlns:p15="http://schemas.microsoft.com/office/powerpoint/2012/main" xmlns:ahyp="http://schemas.microsoft.com/office/drawing/2018/hyperlinkcolor" showMasterPhAnim="0" showMasterSp="0">
+  <p:cSld>
+    <p:spTree>
+      <p:nvGrpSpPr>
+        <p:cNvPr id="137" name="Shape 137"/>
+        <p:cNvGrpSpPr/>
+        <p:nvPr/>
+      </p:nvGrpSpPr>
+      <p:grpSpPr>
+        <a:xfrm>
+          <a:off x="0" y="0"/>
+          <a:ext cx="0" cy="0"/>
+          <a:chOff x="0" y="0"/>
+          <a:chExt cx="0" cy="0"/>
+        </a:xfrm>
+      </p:grpSpPr>
+      <p:sp>
+        <p:nvSpPr>
+          <p:cNvPr id="138" name="Google Shape;138;g3dcfae2e2ef_0_13:notes"/>
+          <p:cNvSpPr/>
+          <p:nvPr>
+            <p:ph idx="2" type="sldImg"/>
+          </p:nvPr>
+        </p:nvSpPr>
+        <p:spPr>
+          <a:xfrm>
+            <a:off x="381300" y="685800"/>
+            <a:ext cx="6096000" cy="3429000"/>
+          </a:xfrm>
+          <a:custGeom>
+            <a:rect b="b" l="l" r="r" t="t"/>
+            <a:pathLst>
+              <a:path extrusionOk="0" h="120000" w="120000">
+                <a:moveTo>
+                  <a:pt x="0" y="0"/>
+                </a:moveTo>
+                <a:lnTo>
+                  <a:pt x="120000" y="0"/>
+                </a:lnTo>
+                <a:lnTo>
+                  <a:pt x="120000" y="120000"/>
+                </a:lnTo>
+                <a:lnTo>
+                  <a:pt x="0" y="120000"/>
+                </a:lnTo>
+                <a:close/>
+              </a:path>
+            </a:pathLst>
+          </a:custGeom>
+        </p:spPr>
+      </p:sp>
+      <p:sp>
+        <p:nvSpPr>
+          <p:cNvPr id="139" name="Google Shape;139;g3dcfae2e2ef_0_13:notes"/>
+          <p:cNvSpPr txBox="1"/>
+          <p:nvPr>
+            <p:ph idx="1" type="body"/>
+          </p:nvPr>
+        </p:nvSpPr>
+        <p:spPr>
+          <a:xfrm>
+            <a:off x="685800" y="4343400"/>
+            <a:ext cx="5486400" cy="4114800"/>
+          </a:xfrm>
+          <a:prstGeom prst="rect">
+            <a:avLst/>
+          </a:prstGeom>
+        </p:spPr>
+        <p:txBody>
+          <a:bodyPr anchorCtr="0" anchor="t" bIns="91425" lIns="91425" spcFirstLastPara="1" rIns="91425" wrap="square" tIns="91425">
+            <a:noAutofit/>
+          </a:bodyPr>
+          <a:lstStyle/>
+          <a:p>
+            <a:pPr indent="0" lvl="0" marL="0" rtl="0" algn="l">
+              <a:spcBef>
+                <a:spcPts val="0"/>
+              </a:spcBef>
+              <a:spcAft>
+                <a:spcPts val="0"/>
+              </a:spcAft>
+              <a:buNone/>
+            </a:pPr>
+            <a:r>
+              <a:t/>
+            </a:r>
+            <a:endParaRPr/>
+          </a:p>
+        </p:txBody>
+      </p:sp>
+    </p:spTree>
+  </p:cSld>
+  <p:clrMapOvr>
+    <a:masterClrMapping/>
+  </p:clrMapOvr>
+</p:notes>
+</file>
+
+<file path=ppt/notesSlides/notesSlide15.xml><?xml version="1.0" encoding="utf-8"?>
+<p:notes xmlns:a="http://schemas.openxmlformats.org/drawingml/2006/main" xmlns:r="http://schemas.openxmlformats.org/officeDocument/2006/relationships" xmlns:mc="http://schemas.openxmlformats.org/markup-compatibility/2006" xmlns:mv="urn:schemas-microsoft-com:mac:vml" xmlns:p="http://schemas.openxmlformats.org/presentationml/2006/main" xmlns:c="http://schemas.openxmlformats.org/drawingml/2006/chart" xmlns:dgm="http://schemas.openxmlformats.org/drawingml/2006/diagram" xmlns:o="urn:schemas-microsoft-com:office:office" xmlns:v="urn:schemas-microsoft-com:vml" xmlns:pvml="urn:schemas-microsoft-com:office:powerpoint" xmlns:com="http://schemas.openxmlformats.org/drawingml/2006/compatibility" xmlns:p14="http://schemas.microsoft.com/office/powerpoint/2010/main" xmlns:p15="http://schemas.microsoft.com/office/powerpoint/2012/main" xmlns:ahyp="http://schemas.microsoft.com/office/drawing/2018/hyperlinkcolor" showMasterPhAnim="0" showMasterSp="0">
+  <p:cSld>
+    <p:spTree>
+      <p:nvGrpSpPr>
+        <p:cNvPr id="143" name="Shape 143"/>
+        <p:cNvGrpSpPr/>
+        <p:nvPr/>
+      </p:nvGrpSpPr>
+      <p:grpSpPr>
+        <a:xfrm>
+          <a:off x="0" y="0"/>
+          <a:ext cx="0" cy="0"/>
+          <a:chOff x="0" y="0"/>
+          <a:chExt cx="0" cy="0"/>
+        </a:xfrm>
+      </p:grpSpPr>
+      <p:sp>
+        <p:nvSpPr>
+          <p:cNvPr id="144" name="Google Shape;144;g3dcfae2e2ef_0_19:notes"/>
+          <p:cNvSpPr/>
+          <p:nvPr>
+            <p:ph idx="2" type="sldImg"/>
+          </p:nvPr>
+        </p:nvSpPr>
+        <p:spPr>
+          <a:xfrm>
+            <a:off x="381300" y="685800"/>
+            <a:ext cx="6096000" cy="3429000"/>
+          </a:xfrm>
+          <a:custGeom>
+            <a:rect b="b" l="l" r="r" t="t"/>
+            <a:pathLst>
+              <a:path extrusionOk="0" h="120000" w="120000">
+                <a:moveTo>
+                  <a:pt x="0" y="0"/>
+                </a:moveTo>
+                <a:lnTo>
+                  <a:pt x="120000" y="0"/>
+                </a:lnTo>
+                <a:lnTo>
+                  <a:pt x="120000" y="120000"/>
+                </a:lnTo>
+                <a:lnTo>
+                  <a:pt x="0" y="120000"/>
+                </a:lnTo>
+                <a:close/>
+              </a:path>
+            </a:pathLst>
+          </a:custGeom>
+        </p:spPr>
+      </p:sp>
+      <p:sp>
+        <p:nvSpPr>
+          <p:cNvPr id="145" name="Google Shape;145;g3dcfae2e2ef_0_19:notes"/>
+          <p:cNvSpPr txBox="1"/>
+          <p:nvPr>
+            <p:ph idx="1" type="body"/>
+          </p:nvPr>
+        </p:nvSpPr>
+        <p:spPr>
+          <a:xfrm>
+            <a:off x="685800" y="4343400"/>
+            <a:ext cx="5486400" cy="4114800"/>
+          </a:xfrm>
+          <a:prstGeom prst="rect">
+            <a:avLst/>
+          </a:prstGeom>
+        </p:spPr>
+        <p:txBody>
+          <a:bodyPr anchorCtr="0" anchor="t" bIns="91425" lIns="91425" spcFirstLastPara="1" rIns="91425" wrap="square" tIns="91425">
+            <a:noAutofit/>
+          </a:bodyPr>
+          <a:lstStyle/>
+          <a:p>
+            <a:pPr indent="0" lvl="0" marL="0" rtl="0" algn="l">
+              <a:spcBef>
+                <a:spcPts val="0"/>
+              </a:spcBef>
+              <a:spcAft>
+                <a:spcPts val="0"/>
+              </a:spcAft>
+              <a:buNone/>
+            </a:pPr>
+            <a:r>
+              <a:t/>
+            </a:r>
+            <a:endParaRPr/>
+          </a:p>
+        </p:txBody>
+      </p:sp>
+    </p:spTree>
+  </p:cSld>
+  <p:clrMapOvr>
+    <a:masterClrMapping/>
+  </p:clrMapOvr>
+</p:notes>
+</file>
+
+<file path=ppt/notesSlides/notesSlide16.xml><?xml version="1.0" encoding="utf-8"?>
+<p:notes xmlns:a="http://schemas.openxmlformats.org/drawingml/2006/main" xmlns:r="http://schemas.openxmlformats.org/officeDocument/2006/relationships" xmlns:mc="http://schemas.openxmlformats.org/markup-compatibility/2006" xmlns:mv="urn:schemas-microsoft-com:mac:vml" xmlns:p="http://schemas.openxmlformats.org/presentationml/2006/main" xmlns:c="http://schemas.openxmlformats.org/drawingml/2006/chart" xmlns:dgm="http://schemas.openxmlformats.org/drawingml/2006/diagram" xmlns:o="urn:schemas-microsoft-com:office:office" xmlns:v="urn:schemas-microsoft-com:vml" xmlns:pvml="urn:schemas-microsoft-com:office:powerpoint" xmlns:com="http://schemas.openxmlformats.org/drawingml/2006/compatibility" xmlns:p14="http://schemas.microsoft.com/office/powerpoint/2010/main" xmlns:p15="http://schemas.microsoft.com/office/powerpoint/2012/main" xmlns:ahyp="http://schemas.microsoft.com/office/drawing/2018/hyperlinkcolor" showMasterPhAnim="0" showMasterSp="0">
+  <p:cSld>
+    <p:spTree>
+      <p:nvGrpSpPr>
+        <p:cNvPr id="149" name="Shape 149"/>
+        <p:cNvGrpSpPr/>
+        <p:nvPr/>
+      </p:nvGrpSpPr>
+      <p:grpSpPr>
+        <a:xfrm>
+          <a:off x="0" y="0"/>
+          <a:ext cx="0" cy="0"/>
+          <a:chOff x="0" y="0"/>
+          <a:chExt cx="0" cy="0"/>
+        </a:xfrm>
+      </p:grpSpPr>
+      <p:sp>
+        <p:nvSpPr>
+          <p:cNvPr id="150" name="Google Shape;150;g3dcfae2e2ef_0_25:notes"/>
+          <p:cNvSpPr/>
+          <p:nvPr>
+            <p:ph idx="2" type="sldImg"/>
+          </p:nvPr>
+        </p:nvSpPr>
+        <p:spPr>
+          <a:xfrm>
+            <a:off x="381300" y="685800"/>
+            <a:ext cx="6096000" cy="3429000"/>
+          </a:xfrm>
+          <a:custGeom>
+            <a:rect b="b" l="l" r="r" t="t"/>
+            <a:pathLst>
+              <a:path extrusionOk="0" h="120000" w="120000">
+                <a:moveTo>
+                  <a:pt x="0" y="0"/>
+                </a:moveTo>
+                <a:lnTo>
+                  <a:pt x="120000" y="0"/>
+                </a:lnTo>
+                <a:lnTo>
+                  <a:pt x="120000" y="120000"/>
+                </a:lnTo>
+                <a:lnTo>
+                  <a:pt x="0" y="120000"/>
+                </a:lnTo>
+                <a:close/>
+              </a:path>
+            </a:pathLst>
+          </a:custGeom>
+        </p:spPr>
+      </p:sp>
+      <p:sp>
+        <p:nvSpPr>
+          <p:cNvPr id="151" name="Google Shape;151;g3dcfae2e2ef_0_25:notes"/>
+          <p:cNvSpPr txBox="1"/>
+          <p:nvPr>
+            <p:ph idx="1" type="body"/>
+          </p:nvPr>
+        </p:nvSpPr>
+        <p:spPr>
+          <a:xfrm>
+            <a:off x="685800" y="4343400"/>
+            <a:ext cx="5486400" cy="4114800"/>
+          </a:xfrm>
+          <a:prstGeom prst="rect">
+            <a:avLst/>
+          </a:prstGeom>
+        </p:spPr>
+        <p:txBody>
+          <a:bodyPr anchorCtr="0" anchor="t" bIns="91425" lIns="91425" spcFirstLastPara="1" rIns="91425" wrap="square" tIns="91425">
+            <a:noAutofit/>
+          </a:bodyPr>
+          <a:lstStyle/>
+          <a:p>
+            <a:pPr indent="0" lvl="0" marL="0" rtl="0" algn="l">
+              <a:spcBef>
+                <a:spcPts val="0"/>
+              </a:spcBef>
+              <a:spcAft>
+                <a:spcPts val="0"/>
+              </a:spcAft>
+              <a:buNone/>
+            </a:pPr>
+            <a:r>
+              <a:t/>
+            </a:r>
+            <a:endParaRPr/>
+          </a:p>
+        </p:txBody>
+      </p:sp>
+    </p:spTree>
+  </p:cSld>
+  <p:clrMapOvr>
+    <a:masterClrMapping/>
+  </p:clrMapOvr>
+</p:notes>
+</file>
+
+<file path=ppt/notesSlides/notesSlide17.xml><?xml version="1.0" encoding="utf-8"?>
+<p:notes xmlns:a="http://schemas.openxmlformats.org/drawingml/2006/main" xmlns:r="http://schemas.openxmlformats.org/officeDocument/2006/relationships" xmlns:mc="http://schemas.openxmlformats.org/markup-compatibility/2006" xmlns:mv="urn:schemas-microsoft-com:mac:vml" xmlns:p="http://schemas.openxmlformats.org/presentationml/2006/main" xmlns:c="http://schemas.openxmlformats.org/drawingml/2006/chart" xmlns:dgm="http://schemas.openxmlformats.org/drawingml/2006/diagram" xmlns:o="urn:schemas-microsoft-com:office:office" xmlns:v="urn:schemas-microsoft-com:vml" xmlns:pvml="urn:schemas-microsoft-com:office:powerpoint" xmlns:com="http://schemas.openxmlformats.org/drawingml/2006/compatibility" xmlns:p14="http://schemas.microsoft.com/office/powerpoint/2010/main" xmlns:p15="http://schemas.microsoft.com/office/powerpoint/2012/main" xmlns:ahyp="http://schemas.microsoft.com/office/drawing/2018/hyperlinkcolor" showMasterPhAnim="0" showMasterSp="0">
+  <p:cSld>
+    <p:spTree>
+      <p:nvGrpSpPr>
+        <p:cNvPr id="155" name="Shape 155"/>
+        <p:cNvGrpSpPr/>
+        <p:nvPr/>
+      </p:nvGrpSpPr>
+      <p:grpSpPr>
+        <a:xfrm>
+          <a:off x="0" y="0"/>
+          <a:ext cx="0" cy="0"/>
+          <a:chOff x="0" y="0"/>
+          <a:chExt cx="0" cy="0"/>
+        </a:xfrm>
+      </p:grpSpPr>
+      <p:sp>
+        <p:nvSpPr>
+          <p:cNvPr id="156" name="Google Shape;156;g3d4479ca5a0_0_7:notes"/>
+          <p:cNvSpPr/>
+          <p:nvPr>
+            <p:ph idx="2" type="sldImg"/>
+          </p:nvPr>
+        </p:nvSpPr>
+        <p:spPr>
+          <a:xfrm>
+            <a:off x="381300" y="685800"/>
+            <a:ext cx="6096000" cy="3429000"/>
+          </a:xfrm>
+          <a:custGeom>
+            <a:rect b="b" l="l" r="r" t="t"/>
+            <a:pathLst>
+              <a:path extrusionOk="0" h="120000" w="120000">
+                <a:moveTo>
+                  <a:pt x="0" y="0"/>
+                </a:moveTo>
+                <a:lnTo>
+                  <a:pt x="120000" y="0"/>
+                </a:lnTo>
+                <a:lnTo>
+                  <a:pt x="120000" y="120000"/>
+                </a:lnTo>
+                <a:lnTo>
+                  <a:pt x="0" y="120000"/>
+                </a:lnTo>
+                <a:close/>
+              </a:path>
+            </a:pathLst>
+          </a:custGeom>
+        </p:spPr>
+      </p:sp>
+      <p:sp>
+        <p:nvSpPr>
+          <p:cNvPr id="157" name="Google Shape;157;g3d4479ca5a0_0_7:notes"/>
+          <p:cNvSpPr txBox="1"/>
+          <p:nvPr>
+            <p:ph idx="1" type="body"/>
+          </p:nvPr>
+        </p:nvSpPr>
+        <p:spPr>
+          <a:xfrm>
+            <a:off x="685800" y="4343400"/>
+            <a:ext cx="5486400" cy="4114800"/>
+          </a:xfrm>
+          <a:prstGeom prst="rect">
+            <a:avLst/>
+          </a:prstGeom>
+        </p:spPr>
+        <p:txBody>
+          <a:bodyPr anchorCtr="0" anchor="t" bIns="91425" lIns="91425" spcFirstLastPara="1" rIns="91425" wrap="square" tIns="91425">
+            <a:noAutofit/>
+          </a:bodyPr>
+          <a:lstStyle/>
+          <a:p>
+            <a:pPr indent="0" lvl="0" marL="0" rtl="0" algn="l">
+              <a:spcBef>
+                <a:spcPts val="0"/>
+              </a:spcBef>
+              <a:spcAft>
+                <a:spcPts val="0"/>
+              </a:spcAft>
+              <a:buNone/>
+            </a:pPr>
+            <a:r>
+              <a:t/>
+            </a:r>
+            <a:endParaRPr/>
+          </a:p>
+        </p:txBody>
+      </p:sp>
+    </p:spTree>
+  </p:cSld>
+  <p:clrMapOvr>
+    <a:masterClrMapping/>
+  </p:clrMapOvr>
+</p:notes>
+</file>
+
+<file path=ppt/notesSlides/notesSlide18.xml><?xml version="1.0" encoding="utf-8"?>
+<p:notes xmlns:a="http://schemas.openxmlformats.org/drawingml/2006/main" xmlns:r="http://schemas.openxmlformats.org/officeDocument/2006/relationships" xmlns:mc="http://schemas.openxmlformats.org/markup-compatibility/2006" xmlns:mv="urn:schemas-microsoft-com:mac:vml" xmlns:p="http://schemas.openxmlformats.org/presentationml/2006/main" xmlns:c="http://schemas.openxmlformats.org/drawingml/2006/chart" xmlns:dgm="http://schemas.openxmlformats.org/drawingml/2006/diagram" xmlns:o="urn:schemas-microsoft-com:office:office" xmlns:v="urn:schemas-microsoft-com:vml" xmlns:pvml="urn:schemas-microsoft-com:office:powerpoint" xmlns:com="http://schemas.openxmlformats.org/drawingml/2006/compatibility" xmlns:p14="http://schemas.microsoft.com/office/powerpoint/2010/main" xmlns:p15="http://schemas.microsoft.com/office/powerpoint/2012/main" xmlns:ahyp="http://schemas.microsoft.com/office/drawing/2018/hyperlinkcolor" showMasterPhAnim="0" showMasterSp="0">
+  <p:cSld>
+    <p:spTree>
+      <p:nvGrpSpPr>
+        <p:cNvPr id="161" name="Shape 161"/>
+        <p:cNvGrpSpPr/>
+        <p:nvPr/>
+      </p:nvGrpSpPr>
+      <p:grpSpPr>
+        <a:xfrm>
+          <a:off x="0" y="0"/>
+          <a:ext cx="0" cy="0"/>
+          <a:chOff x="0" y="0"/>
+          <a:chExt cx="0" cy="0"/>
+        </a:xfrm>
+      </p:grpSpPr>
+      <p:sp>
+        <p:nvSpPr>
+          <p:cNvPr id="162" name="Google Shape;162;g3d47b5df143_0_0:notes"/>
+          <p:cNvSpPr/>
+          <p:nvPr>
+            <p:ph idx="2" type="sldImg"/>
+          </p:nvPr>
+        </p:nvSpPr>
+        <p:spPr>
+          <a:xfrm>
+            <a:off x="381300" y="685800"/>
+            <a:ext cx="6096000" cy="3429000"/>
+          </a:xfrm>
+          <a:custGeom>
+            <a:rect b="b" l="l" r="r" t="t"/>
+            <a:pathLst>
+              <a:path extrusionOk="0" h="120000" w="120000">
+                <a:moveTo>
+                  <a:pt x="0" y="0"/>
+                </a:moveTo>
+                <a:lnTo>
+                  <a:pt x="120000" y="0"/>
+                </a:lnTo>
+                <a:lnTo>
+                  <a:pt x="120000" y="120000"/>
+                </a:lnTo>
+                <a:lnTo>
+                  <a:pt x="0" y="120000"/>
+                </a:lnTo>
+                <a:close/>
+              </a:path>
+            </a:pathLst>
+          </a:custGeom>
+        </p:spPr>
+      </p:sp>
+      <p:sp>
+        <p:nvSpPr>
+          <p:cNvPr id="163" name="Google Shape;163;g3d47b5df143_0_0:notes"/>
+          <p:cNvSpPr txBox="1"/>
+          <p:nvPr>
+            <p:ph idx="1" type="body"/>
+          </p:nvPr>
+        </p:nvSpPr>
+        <p:spPr>
+          <a:xfrm>
+            <a:off x="685800" y="4343400"/>
+            <a:ext cx="5486400" cy="4114800"/>
+          </a:xfrm>
+          <a:prstGeom prst="rect">
+            <a:avLst/>
+          </a:prstGeom>
+        </p:spPr>
+        <p:txBody>
+          <a:bodyPr anchorCtr="0" anchor="t" bIns="91425" lIns="91425" spcFirstLastPara="1" rIns="91425" wrap="square" tIns="91425">
+            <a:noAutofit/>
+          </a:bodyPr>
+          <a:lstStyle/>
+          <a:p>
+            <a:pPr indent="0" lvl="0" marL="0" rtl="0" algn="l">
+              <a:spcBef>
+                <a:spcPts val="0"/>
+              </a:spcBef>
+              <a:spcAft>
+                <a:spcPts val="0"/>
+              </a:spcAft>
+              <a:buNone/>
+            </a:pPr>
+            <a:r>
+              <a:t/>
+            </a:r>
+            <a:endParaRPr/>
+          </a:p>
+        </p:txBody>
+      </p:sp>
+    </p:spTree>
+  </p:cSld>
+  <p:clrMapOvr>
+    <a:masterClrMapping/>
+  </p:clrMapOvr>
+</p:notes>
+</file>
+
+<file path=ppt/notesSlides/notesSlide19.xml><?xml version="1.0" encoding="utf-8"?>
+<p:notes xmlns:a="http://schemas.openxmlformats.org/drawingml/2006/main" xmlns:r="http://schemas.openxmlformats.org/officeDocument/2006/relationships" xmlns:mc="http://schemas.openxmlformats.org/markup-compatibility/2006" xmlns:mv="urn:schemas-microsoft-com:mac:vml" xmlns:p="http://schemas.openxmlformats.org/presentationml/2006/main" xmlns:c="http://schemas.openxmlformats.org/drawingml/2006/chart" xmlns:dgm="http://schemas.openxmlformats.org/drawingml/2006/diagram" xmlns:o="urn:schemas-microsoft-com:office:office" xmlns:v="urn:schemas-microsoft-com:vml" xmlns:pvml="urn:schemas-microsoft-com:office:powerpoint" xmlns:com="http://schemas.openxmlformats.org/drawingml/2006/compatibility" xmlns:p14="http://schemas.microsoft.com/office/powerpoint/2010/main" xmlns:p15="http://schemas.microsoft.com/office/powerpoint/2012/main" xmlns:ahyp="http://schemas.microsoft.com/office/drawing/2018/hyperlinkcolor" showMasterPhAnim="0" showMasterSp="0">
+  <p:cSld>
+    <p:spTree>
+      <p:nvGrpSpPr>
+        <p:cNvPr id="170" name="Shape 170"/>
+        <p:cNvGrpSpPr/>
+        <p:nvPr/>
+      </p:nvGrpSpPr>
+      <p:grpSpPr>
+        <a:xfrm>
+          <a:off x="0" y="0"/>
+          <a:ext cx="0" cy="0"/>
+          <a:chOff x="0" y="0"/>
+          <a:chExt cx="0" cy="0"/>
+        </a:xfrm>
+      </p:grpSpPr>
+      <p:sp>
+        <p:nvSpPr>
+          <p:cNvPr id="171" name="Google Shape;171;g3d47b5df143_0_8:notes"/>
+          <p:cNvSpPr/>
+          <p:nvPr>
+            <p:ph idx="2" type="sldImg"/>
+          </p:nvPr>
+        </p:nvSpPr>
+        <p:spPr>
+          <a:xfrm>
+            <a:off x="381300" y="685800"/>
+            <a:ext cx="6096000" cy="3429000"/>
+          </a:xfrm>
+          <a:custGeom>
+            <a:rect b="b" l="l" r="r" t="t"/>
+            <a:pathLst>
+              <a:path extrusionOk="0" h="120000" w="120000">
+                <a:moveTo>
+                  <a:pt x="0" y="0"/>
+                </a:moveTo>
+                <a:lnTo>
+                  <a:pt x="120000" y="0"/>
+                </a:lnTo>
+                <a:lnTo>
+                  <a:pt x="120000" y="120000"/>
+                </a:lnTo>
+                <a:lnTo>
+                  <a:pt x="0" y="120000"/>
+                </a:lnTo>
+                <a:close/>
+              </a:path>
+            </a:pathLst>
+          </a:custGeom>
+        </p:spPr>
+      </p:sp>
+      <p:sp>
+        <p:nvSpPr>
+          <p:cNvPr id="172" name="Google Shape;172;g3d47b5df143_0_8:notes"/>
+          <p:cNvSpPr txBox="1"/>
+          <p:nvPr>
+            <p:ph idx="1" type="body"/>
+          </p:nvPr>
+        </p:nvSpPr>
+        <p:spPr>
+          <a:xfrm>
+            <a:off x="685800" y="4343400"/>
+            <a:ext cx="5486400" cy="4114800"/>
+          </a:xfrm>
+          <a:prstGeom prst="rect">
+            <a:avLst/>
+          </a:prstGeom>
+        </p:spPr>
+        <p:txBody>
+          <a:bodyPr anchorCtr="0" anchor="t" bIns="91425" lIns="91425" spcFirstLastPara="1" rIns="91425" wrap="square" tIns="91425">
+            <a:noAutofit/>
+          </a:bodyPr>
+          <a:lstStyle/>
+          <a:p>
+            <a:pPr indent="0" lvl="0" marL="0" rtl="0" algn="l">
+              <a:spcBef>
+                <a:spcPts val="0"/>
+              </a:spcBef>
+              <a:spcAft>
+                <a:spcPts val="0"/>
+              </a:spcAft>
+              <a:buNone/>
+            </a:pPr>
+            <a:r>
+              <a:t/>
+            </a:r>
+            <a:endParaRPr/>
+          </a:p>
+        </p:txBody>
+      </p:sp>
+    </p:spTree>
+  </p:cSld>
+  <p:clrMapOvr>
+    <a:masterClrMapping/>
+  </p:clrMapOvr>
+</p:notes>
+</file>
+
+<file path=ppt/notesSlides/notesSlide2.xml><?xml version="1.0" encoding="utf-8"?>
+<p:notes xmlns:a="http://schemas.openxmlformats.org/drawingml/2006/main" xmlns:r="http://schemas.openxmlformats.org/officeDocument/2006/relationships" xmlns:mc="http://schemas.openxmlformats.org/markup-compatibility/2006" xmlns:mv="urn:schemas-microsoft-com:mac:vml" xmlns:p="http://schemas.openxmlformats.org/presentationml/2006/main" xmlns:c="http://schemas.openxmlformats.org/drawingml/2006/chart" xmlns:dgm="http://schemas.openxmlformats.org/drawingml/2006/diagram" xmlns:o="urn:schemas-microsoft-com:office:office" xmlns:v="urn:schemas-microsoft-com:vml" xmlns:pvml="urn:schemas-microsoft-com:office:powerpoint" xmlns:com="http://schemas.openxmlformats.org/drawingml/2006/compatibility" xmlns:p14="http://schemas.microsoft.com/office/powerpoint/2010/main" xmlns:p15="http://schemas.microsoft.com/office/powerpoint/2012/main" xmlns:ahyp="http://schemas.microsoft.com/office/drawing/2018/hyperlinkcolor" showMasterPhAnim="0" showMasterSp="0">
+  <p:cSld>
+    <p:spTree>
+      <p:nvGrpSpPr>
+        <p:cNvPr id="55" name="Shape 55"/>
+        <p:cNvGrpSpPr/>
+        <p:nvPr/>
+      </p:nvGrpSpPr>
+      <p:grpSpPr>
+        <a:xfrm>
+          <a:off x="0" y="0"/>
+          <a:ext cx="0" cy="0"/>
+          <a:chOff x="0" y="0"/>
+          <a:chExt cx="0" cy="0"/>
+        </a:xfrm>
+      </p:grpSpPr>
+      <p:sp>
+        <p:nvSpPr>
+          <p:cNvPr id="56" name="Google Shape;56;g3d47b5df143_0_19:notes"/>
+          <p:cNvSpPr/>
+          <p:nvPr>
+            <p:ph idx="2" type="sldImg"/>
+          </p:nvPr>
+        </p:nvSpPr>
+        <p:spPr>
+          <a:xfrm>
+            <a:off x="381300" y="685800"/>
+            <a:ext cx="6096000" cy="3429000"/>
+          </a:xfrm>
+          <a:custGeom>
+            <a:rect b="b" l="l" r="r" t="t"/>
+            <a:pathLst>
+              <a:path extrusionOk="0" h="120000" w="120000">
+                <a:moveTo>
+                  <a:pt x="0" y="0"/>
+                </a:moveTo>
+                <a:lnTo>
+                  <a:pt x="120000" y="0"/>
+                </a:lnTo>
+                <a:lnTo>
+                  <a:pt x="120000" y="120000"/>
+                </a:lnTo>
+                <a:lnTo>
+                  <a:pt x="0" y="120000"/>
+                </a:lnTo>
+                <a:close/>
+              </a:path>
+            </a:pathLst>
+          </a:custGeom>
+        </p:spPr>
+      </p:sp>
+      <p:sp>
+        <p:nvSpPr>
+          <p:cNvPr id="57" name="Google Shape;57;g3d47b5df143_0_19:notes"/>
           <p:cNvSpPr txBox="1"/>
           <p:nvPr>
             <p:ph idx="1" type="body"/>
@@ -893,7 +1906,7 @@
   <p:cSld>
     <p:spTree>
       <p:nvGrpSpPr>
-        <p:cNvPr id="61" name="Shape 61"/>
+        <p:cNvPr id="60" name="Shape 60"/>
         <p:cNvGrpSpPr/>
         <p:nvPr/>
       </p:nvGrpSpPr>
@@ -907,7 +1920,7 @@
       </p:grpSpPr>
       <p:sp>
         <p:nvSpPr>
-          <p:cNvPr id="62" name="Google Shape;62;g3dce7d8d330_0_6:notes"/>
+          <p:cNvPr id="61" name="Google Shape;61;g3d4479ca5a0_0_33:notes"/>
           <p:cNvSpPr/>
           <p:nvPr>
             <p:ph idx="2" type="sldImg"/>
@@ -942,7 +1955,7 @@
       </p:sp>
       <p:sp>
         <p:nvSpPr>
-          <p:cNvPr id="63" name="Google Shape;63;g3dce7d8d330_0_6:notes"/>
+          <p:cNvPr id="62" name="Google Shape;62;g3d4479ca5a0_0_33:notes"/>
           <p:cNvSpPr txBox="1"/>
           <p:nvPr>
             <p:ph idx="1" type="body"/>
@@ -992,7 +2005,7 @@
   <p:cSld>
     <p:spTree>
       <p:nvGrpSpPr>
-        <p:cNvPr id="68" name="Shape 68"/>
+        <p:cNvPr id="67" name="Shape 67"/>
         <p:cNvGrpSpPr/>
         <p:nvPr/>
       </p:nvGrpSpPr>
@@ -1006,7 +2019,7 @@
       </p:grpSpPr>
       <p:sp>
         <p:nvSpPr>
-          <p:cNvPr id="69" name="Google Shape;69;g3dce7d8d330_0_12:notes"/>
+          <p:cNvPr id="68" name="Google Shape;68;g3d4479ca5a0_0_41:notes"/>
           <p:cNvSpPr/>
           <p:nvPr>
             <p:ph idx="2" type="sldImg"/>
@@ -1041,7 +2054,7 @@
       </p:sp>
       <p:sp>
         <p:nvSpPr>
-          <p:cNvPr id="70" name="Google Shape;70;g3dce7d8d330_0_12:notes"/>
+          <p:cNvPr id="69" name="Google Shape;69;g3d4479ca5a0_0_41:notes"/>
           <p:cNvSpPr txBox="1"/>
           <p:nvPr>
             <p:ph idx="1" type="body"/>
@@ -1105,7 +2118,7 @@
       </p:grpSpPr>
       <p:sp>
         <p:nvSpPr>
-          <p:cNvPr id="75" name="Google Shape;75;g3dcfae2e2ef_0_1:notes"/>
+          <p:cNvPr id="75" name="Google Shape;75;g3d4479ca5a0_0_49:notes"/>
           <p:cNvSpPr/>
           <p:nvPr>
             <p:ph idx="2" type="sldImg"/>
@@ -1140,7 +2153,403 @@
       </p:sp>
       <p:sp>
         <p:nvSpPr>
-          <p:cNvPr id="76" name="Google Shape;76;g3dcfae2e2ef_0_1:notes"/>
+          <p:cNvPr id="76" name="Google Shape;76;g3d4479ca5a0_0_49:notes"/>
+          <p:cNvSpPr txBox="1"/>
+          <p:nvPr>
+            <p:ph idx="1" type="body"/>
+          </p:nvPr>
+        </p:nvSpPr>
+        <p:spPr>
+          <a:xfrm>
+            <a:off x="685800" y="4343400"/>
+            <a:ext cx="5486400" cy="4114800"/>
+          </a:xfrm>
+          <a:prstGeom prst="rect">
+            <a:avLst/>
+          </a:prstGeom>
+        </p:spPr>
+        <p:txBody>
+          <a:bodyPr anchorCtr="0" anchor="t" bIns="91425" lIns="91425" spcFirstLastPara="1" rIns="91425" wrap="square" tIns="91425">
+            <a:noAutofit/>
+          </a:bodyPr>
+          <a:lstStyle/>
+          <a:p>
+            <a:pPr indent="0" lvl="0" marL="0" rtl="0" algn="l">
+              <a:spcBef>
+                <a:spcPts val="0"/>
+              </a:spcBef>
+              <a:spcAft>
+                <a:spcPts val="0"/>
+              </a:spcAft>
+              <a:buNone/>
+            </a:pPr>
+            <a:r>
+              <a:t/>
+            </a:r>
+            <a:endParaRPr/>
+          </a:p>
+        </p:txBody>
+      </p:sp>
+    </p:spTree>
+  </p:cSld>
+  <p:clrMapOvr>
+    <a:masterClrMapping/>
+  </p:clrMapOvr>
+</p:notes>
+</file>
+
+<file path=ppt/notesSlides/notesSlide6.xml><?xml version="1.0" encoding="utf-8"?>
+<p:notes xmlns:a="http://schemas.openxmlformats.org/drawingml/2006/main" xmlns:r="http://schemas.openxmlformats.org/officeDocument/2006/relationships" xmlns:mc="http://schemas.openxmlformats.org/markup-compatibility/2006" xmlns:mv="urn:schemas-microsoft-com:mac:vml" xmlns:p="http://schemas.openxmlformats.org/presentationml/2006/main" xmlns:c="http://schemas.openxmlformats.org/drawingml/2006/chart" xmlns:dgm="http://schemas.openxmlformats.org/drawingml/2006/diagram" xmlns:o="urn:schemas-microsoft-com:office:office" xmlns:v="urn:schemas-microsoft-com:vml" xmlns:pvml="urn:schemas-microsoft-com:office:powerpoint" xmlns:com="http://schemas.openxmlformats.org/drawingml/2006/compatibility" xmlns:p14="http://schemas.microsoft.com/office/powerpoint/2010/main" xmlns:p15="http://schemas.microsoft.com/office/powerpoint/2012/main" xmlns:ahyp="http://schemas.microsoft.com/office/drawing/2018/hyperlinkcolor" showMasterPhAnim="0" showMasterSp="0">
+  <p:cSld>
+    <p:spTree>
+      <p:nvGrpSpPr>
+        <p:cNvPr id="80" name="Shape 80"/>
+        <p:cNvGrpSpPr/>
+        <p:nvPr/>
+      </p:nvGrpSpPr>
+      <p:grpSpPr>
+        <a:xfrm>
+          <a:off x="0" y="0"/>
+          <a:ext cx="0" cy="0"/>
+          <a:chOff x="0" y="0"/>
+          <a:chExt cx="0" cy="0"/>
+        </a:xfrm>
+      </p:grpSpPr>
+      <p:sp>
+        <p:nvSpPr>
+          <p:cNvPr id="81" name="Google Shape;81;g3dce7d8d330_0_0:notes"/>
+          <p:cNvSpPr/>
+          <p:nvPr>
+            <p:ph idx="2" type="sldImg"/>
+          </p:nvPr>
+        </p:nvSpPr>
+        <p:spPr>
+          <a:xfrm>
+            <a:off x="381300" y="685800"/>
+            <a:ext cx="6096000" cy="3429000"/>
+          </a:xfrm>
+          <a:custGeom>
+            <a:rect b="b" l="l" r="r" t="t"/>
+            <a:pathLst>
+              <a:path extrusionOk="0" h="120000" w="120000">
+                <a:moveTo>
+                  <a:pt x="0" y="0"/>
+                </a:moveTo>
+                <a:lnTo>
+                  <a:pt x="120000" y="0"/>
+                </a:lnTo>
+                <a:lnTo>
+                  <a:pt x="120000" y="120000"/>
+                </a:lnTo>
+                <a:lnTo>
+                  <a:pt x="0" y="120000"/>
+                </a:lnTo>
+                <a:close/>
+              </a:path>
+            </a:pathLst>
+          </a:custGeom>
+        </p:spPr>
+      </p:sp>
+      <p:sp>
+        <p:nvSpPr>
+          <p:cNvPr id="82" name="Google Shape;82;g3dce7d8d330_0_0:notes"/>
+          <p:cNvSpPr txBox="1"/>
+          <p:nvPr>
+            <p:ph idx="1" type="body"/>
+          </p:nvPr>
+        </p:nvSpPr>
+        <p:spPr>
+          <a:xfrm>
+            <a:off x="685800" y="4343400"/>
+            <a:ext cx="5486400" cy="4114800"/>
+          </a:xfrm>
+          <a:prstGeom prst="rect">
+            <a:avLst/>
+          </a:prstGeom>
+        </p:spPr>
+        <p:txBody>
+          <a:bodyPr anchorCtr="0" anchor="t" bIns="91425" lIns="91425" spcFirstLastPara="1" rIns="91425" wrap="square" tIns="91425">
+            <a:noAutofit/>
+          </a:bodyPr>
+          <a:lstStyle/>
+          <a:p>
+            <a:pPr indent="0" lvl="0" marL="0" rtl="0" algn="l">
+              <a:spcBef>
+                <a:spcPts val="0"/>
+              </a:spcBef>
+              <a:spcAft>
+                <a:spcPts val="0"/>
+              </a:spcAft>
+              <a:buNone/>
+            </a:pPr>
+            <a:r>
+              <a:t/>
+            </a:r>
+            <a:endParaRPr/>
+          </a:p>
+        </p:txBody>
+      </p:sp>
+    </p:spTree>
+  </p:cSld>
+  <p:clrMapOvr>
+    <a:masterClrMapping/>
+  </p:clrMapOvr>
+</p:notes>
+</file>
+
+<file path=ppt/notesSlides/notesSlide7.xml><?xml version="1.0" encoding="utf-8"?>
+<p:notes xmlns:a="http://schemas.openxmlformats.org/drawingml/2006/main" xmlns:r="http://schemas.openxmlformats.org/officeDocument/2006/relationships" xmlns:mc="http://schemas.openxmlformats.org/markup-compatibility/2006" xmlns:mv="urn:schemas-microsoft-com:mac:vml" xmlns:p="http://schemas.openxmlformats.org/presentationml/2006/main" xmlns:c="http://schemas.openxmlformats.org/drawingml/2006/chart" xmlns:dgm="http://schemas.openxmlformats.org/drawingml/2006/diagram" xmlns:o="urn:schemas-microsoft-com:office:office" xmlns:v="urn:schemas-microsoft-com:vml" xmlns:pvml="urn:schemas-microsoft-com:office:powerpoint" xmlns:com="http://schemas.openxmlformats.org/drawingml/2006/compatibility" xmlns:p14="http://schemas.microsoft.com/office/powerpoint/2010/main" xmlns:p15="http://schemas.microsoft.com/office/powerpoint/2012/main" xmlns:ahyp="http://schemas.microsoft.com/office/drawing/2018/hyperlinkcolor" showMasterPhAnim="0" showMasterSp="0">
+  <p:cSld>
+    <p:spTree>
+      <p:nvGrpSpPr>
+        <p:cNvPr id="86" name="Shape 86"/>
+        <p:cNvGrpSpPr/>
+        <p:nvPr/>
+      </p:nvGrpSpPr>
+      <p:grpSpPr>
+        <a:xfrm>
+          <a:off x="0" y="0"/>
+          <a:ext cx="0" cy="0"/>
+          <a:chOff x="0" y="0"/>
+          <a:chExt cx="0" cy="0"/>
+        </a:xfrm>
+      </p:grpSpPr>
+      <p:sp>
+        <p:nvSpPr>
+          <p:cNvPr id="87" name="Google Shape;87;g3dce7d8d330_0_6:notes"/>
+          <p:cNvSpPr/>
+          <p:nvPr>
+            <p:ph idx="2" type="sldImg"/>
+          </p:nvPr>
+        </p:nvSpPr>
+        <p:spPr>
+          <a:xfrm>
+            <a:off x="381300" y="685800"/>
+            <a:ext cx="6096000" cy="3429000"/>
+          </a:xfrm>
+          <a:custGeom>
+            <a:rect b="b" l="l" r="r" t="t"/>
+            <a:pathLst>
+              <a:path extrusionOk="0" h="120000" w="120000">
+                <a:moveTo>
+                  <a:pt x="0" y="0"/>
+                </a:moveTo>
+                <a:lnTo>
+                  <a:pt x="120000" y="0"/>
+                </a:lnTo>
+                <a:lnTo>
+                  <a:pt x="120000" y="120000"/>
+                </a:lnTo>
+                <a:lnTo>
+                  <a:pt x="0" y="120000"/>
+                </a:lnTo>
+                <a:close/>
+              </a:path>
+            </a:pathLst>
+          </a:custGeom>
+        </p:spPr>
+      </p:sp>
+      <p:sp>
+        <p:nvSpPr>
+          <p:cNvPr id="88" name="Google Shape;88;g3dce7d8d330_0_6:notes"/>
+          <p:cNvSpPr txBox="1"/>
+          <p:nvPr>
+            <p:ph idx="1" type="body"/>
+          </p:nvPr>
+        </p:nvSpPr>
+        <p:spPr>
+          <a:xfrm>
+            <a:off x="685800" y="4343400"/>
+            <a:ext cx="5486400" cy="4114800"/>
+          </a:xfrm>
+          <a:prstGeom prst="rect">
+            <a:avLst/>
+          </a:prstGeom>
+        </p:spPr>
+        <p:txBody>
+          <a:bodyPr anchorCtr="0" anchor="t" bIns="91425" lIns="91425" spcFirstLastPara="1" rIns="91425" wrap="square" tIns="91425">
+            <a:noAutofit/>
+          </a:bodyPr>
+          <a:lstStyle/>
+          <a:p>
+            <a:pPr indent="0" lvl="0" marL="0" rtl="0" algn="l">
+              <a:spcBef>
+                <a:spcPts val="0"/>
+              </a:spcBef>
+              <a:spcAft>
+                <a:spcPts val="0"/>
+              </a:spcAft>
+              <a:buNone/>
+            </a:pPr>
+            <a:r>
+              <a:t/>
+            </a:r>
+            <a:endParaRPr/>
+          </a:p>
+        </p:txBody>
+      </p:sp>
+    </p:spTree>
+  </p:cSld>
+  <p:clrMapOvr>
+    <a:masterClrMapping/>
+  </p:clrMapOvr>
+</p:notes>
+</file>
+
+<file path=ppt/notesSlides/notesSlide8.xml><?xml version="1.0" encoding="utf-8"?>
+<p:notes xmlns:a="http://schemas.openxmlformats.org/drawingml/2006/main" xmlns:r="http://schemas.openxmlformats.org/officeDocument/2006/relationships" xmlns:mc="http://schemas.openxmlformats.org/markup-compatibility/2006" xmlns:mv="urn:schemas-microsoft-com:mac:vml" xmlns:p="http://schemas.openxmlformats.org/presentationml/2006/main" xmlns:c="http://schemas.openxmlformats.org/drawingml/2006/chart" xmlns:dgm="http://schemas.openxmlformats.org/drawingml/2006/diagram" xmlns:o="urn:schemas-microsoft-com:office:office" xmlns:v="urn:schemas-microsoft-com:vml" xmlns:pvml="urn:schemas-microsoft-com:office:powerpoint" xmlns:com="http://schemas.openxmlformats.org/drawingml/2006/compatibility" xmlns:p14="http://schemas.microsoft.com/office/powerpoint/2010/main" xmlns:p15="http://schemas.microsoft.com/office/powerpoint/2012/main" xmlns:ahyp="http://schemas.microsoft.com/office/drawing/2018/hyperlinkcolor" showMasterPhAnim="0" showMasterSp="0">
+  <p:cSld>
+    <p:spTree>
+      <p:nvGrpSpPr>
+        <p:cNvPr id="93" name="Shape 93"/>
+        <p:cNvGrpSpPr/>
+        <p:nvPr/>
+      </p:nvGrpSpPr>
+      <p:grpSpPr>
+        <a:xfrm>
+          <a:off x="0" y="0"/>
+          <a:ext cx="0" cy="0"/>
+          <a:chOff x="0" y="0"/>
+          <a:chExt cx="0" cy="0"/>
+        </a:xfrm>
+      </p:grpSpPr>
+      <p:sp>
+        <p:nvSpPr>
+          <p:cNvPr id="94" name="Google Shape;94;g3dce7d8d330_0_12:notes"/>
+          <p:cNvSpPr/>
+          <p:nvPr>
+            <p:ph idx="2" type="sldImg"/>
+          </p:nvPr>
+        </p:nvSpPr>
+        <p:spPr>
+          <a:xfrm>
+            <a:off x="381300" y="685800"/>
+            <a:ext cx="6096000" cy="3429000"/>
+          </a:xfrm>
+          <a:custGeom>
+            <a:rect b="b" l="l" r="r" t="t"/>
+            <a:pathLst>
+              <a:path extrusionOk="0" h="120000" w="120000">
+                <a:moveTo>
+                  <a:pt x="0" y="0"/>
+                </a:moveTo>
+                <a:lnTo>
+                  <a:pt x="120000" y="0"/>
+                </a:lnTo>
+                <a:lnTo>
+                  <a:pt x="120000" y="120000"/>
+                </a:lnTo>
+                <a:lnTo>
+                  <a:pt x="0" y="120000"/>
+                </a:lnTo>
+                <a:close/>
+              </a:path>
+            </a:pathLst>
+          </a:custGeom>
+        </p:spPr>
+      </p:sp>
+      <p:sp>
+        <p:nvSpPr>
+          <p:cNvPr id="95" name="Google Shape;95;g3dce7d8d330_0_12:notes"/>
+          <p:cNvSpPr txBox="1"/>
+          <p:nvPr>
+            <p:ph idx="1" type="body"/>
+          </p:nvPr>
+        </p:nvSpPr>
+        <p:spPr>
+          <a:xfrm>
+            <a:off x="685800" y="4343400"/>
+            <a:ext cx="5486400" cy="4114800"/>
+          </a:xfrm>
+          <a:prstGeom prst="rect">
+            <a:avLst/>
+          </a:prstGeom>
+        </p:spPr>
+        <p:txBody>
+          <a:bodyPr anchorCtr="0" anchor="t" bIns="91425" lIns="91425" spcFirstLastPara="1" rIns="91425" wrap="square" tIns="91425">
+            <a:noAutofit/>
+          </a:bodyPr>
+          <a:lstStyle/>
+          <a:p>
+            <a:pPr indent="0" lvl="0" marL="0" rtl="0" algn="l">
+              <a:spcBef>
+                <a:spcPts val="0"/>
+              </a:spcBef>
+              <a:spcAft>
+                <a:spcPts val="0"/>
+              </a:spcAft>
+              <a:buNone/>
+            </a:pPr>
+            <a:r>
+              <a:t/>
+            </a:r>
+            <a:endParaRPr/>
+          </a:p>
+        </p:txBody>
+      </p:sp>
+    </p:spTree>
+  </p:cSld>
+  <p:clrMapOvr>
+    <a:masterClrMapping/>
+  </p:clrMapOvr>
+</p:notes>
+</file>
+
+<file path=ppt/notesSlides/notesSlide9.xml><?xml version="1.0" encoding="utf-8"?>
+<p:notes xmlns:a="http://schemas.openxmlformats.org/drawingml/2006/main" xmlns:r="http://schemas.openxmlformats.org/officeDocument/2006/relationships" xmlns:mc="http://schemas.openxmlformats.org/markup-compatibility/2006" xmlns:mv="urn:schemas-microsoft-com:mac:vml" xmlns:p="http://schemas.openxmlformats.org/presentationml/2006/main" xmlns:c="http://schemas.openxmlformats.org/drawingml/2006/chart" xmlns:dgm="http://schemas.openxmlformats.org/drawingml/2006/diagram" xmlns:o="urn:schemas-microsoft-com:office:office" xmlns:v="urn:schemas-microsoft-com:vml" xmlns:pvml="urn:schemas-microsoft-com:office:powerpoint" xmlns:com="http://schemas.openxmlformats.org/drawingml/2006/compatibility" xmlns:p14="http://schemas.microsoft.com/office/powerpoint/2010/main" xmlns:p15="http://schemas.microsoft.com/office/powerpoint/2012/main" xmlns:ahyp="http://schemas.microsoft.com/office/drawing/2018/hyperlinkcolor" showMasterPhAnim="0" showMasterSp="0">
+  <p:cSld>
+    <p:spTree>
+      <p:nvGrpSpPr>
+        <p:cNvPr id="99" name="Shape 99"/>
+        <p:cNvGrpSpPr/>
+        <p:nvPr/>
+      </p:nvGrpSpPr>
+      <p:grpSpPr>
+        <a:xfrm>
+          <a:off x="0" y="0"/>
+          <a:ext cx="0" cy="0"/>
+          <a:chOff x="0" y="0"/>
+          <a:chExt cx="0" cy="0"/>
+        </a:xfrm>
+      </p:grpSpPr>
+      <p:sp>
+        <p:nvSpPr>
+          <p:cNvPr id="100" name="Google Shape;100;g3dcfae2e2ef_0_1:notes"/>
+          <p:cNvSpPr/>
+          <p:nvPr>
+            <p:ph idx="2" type="sldImg"/>
+          </p:nvPr>
+        </p:nvSpPr>
+        <p:spPr>
+          <a:xfrm>
+            <a:off x="381300" y="685800"/>
+            <a:ext cx="6096000" cy="3429000"/>
+          </a:xfrm>
+          <a:custGeom>
+            <a:rect b="b" l="l" r="r" t="t"/>
+            <a:pathLst>
+              <a:path extrusionOk="0" h="120000" w="120000">
+                <a:moveTo>
+                  <a:pt x="0" y="0"/>
+                </a:moveTo>
+                <a:lnTo>
+                  <a:pt x="120000" y="0"/>
+                </a:lnTo>
+                <a:lnTo>
+                  <a:pt x="120000" y="120000"/>
+                </a:lnTo>
+                <a:lnTo>
+                  <a:pt x="0" y="120000"/>
+                </a:lnTo>
+                <a:close/>
+              </a:path>
+            </a:pathLst>
+          </a:custGeom>
+        </p:spPr>
+      </p:sp>
+      <p:sp>
+        <p:nvSpPr>
+          <p:cNvPr id="101" name="Google Shape;101;g3dcfae2e2ef_0_1:notes"/>
           <p:cNvSpPr txBox="1"/>
           <p:nvPr>
             <p:ph idx="1" type="body"/>
@@ -5899,6 +7308,1401 @@
 </p:sld>
 </file>
 
+<file path=ppt/slides/slide10.xml><?xml version="1.0" encoding="utf-8"?>
+<p:sld xmlns:a="http://schemas.openxmlformats.org/drawingml/2006/main" xmlns:r="http://schemas.openxmlformats.org/officeDocument/2006/relationships" xmlns:mc="http://schemas.openxmlformats.org/markup-compatibility/2006" xmlns:mv="urn:schemas-microsoft-com:mac:vml" xmlns:p="http://schemas.openxmlformats.org/presentationml/2006/main" xmlns:c="http://schemas.openxmlformats.org/drawingml/2006/chart" xmlns:dgm="http://schemas.openxmlformats.org/drawingml/2006/diagram" xmlns:o="urn:schemas-microsoft-com:office:office" xmlns:v="urn:schemas-microsoft-com:vml" xmlns:pvml="urn:schemas-microsoft-com:office:powerpoint" xmlns:com="http://schemas.openxmlformats.org/drawingml/2006/compatibility" xmlns:p14="http://schemas.microsoft.com/office/powerpoint/2010/main" xmlns:p15="http://schemas.microsoft.com/office/powerpoint/2012/main" xmlns:ahyp="http://schemas.microsoft.com/office/drawing/2018/hyperlinkcolor">
+  <p:cSld>
+    <p:spTree>
+      <p:nvGrpSpPr>
+        <p:cNvPr id="108" name="Shape 108"/>
+        <p:cNvGrpSpPr/>
+        <p:nvPr/>
+      </p:nvGrpSpPr>
+      <p:grpSpPr>
+        <a:xfrm>
+          <a:off x="0" y="0"/>
+          <a:ext cx="0" cy="0"/>
+          <a:chOff x="0" y="0"/>
+          <a:chExt cx="0" cy="0"/>
+        </a:xfrm>
+      </p:grpSpPr>
+      <p:sp>
+        <p:nvSpPr>
+          <p:cNvPr id="109" name="Google Shape;109;p22"/>
+          <p:cNvSpPr txBox="1"/>
+          <p:nvPr>
+            <p:ph idx="1" type="body"/>
+          </p:nvPr>
+        </p:nvSpPr>
+        <p:spPr>
+          <a:xfrm>
+            <a:off x="311700" y="1152475"/>
+            <a:ext cx="8520600" cy="3416400"/>
+          </a:xfrm>
+          <a:prstGeom prst="rect">
+            <a:avLst/>
+          </a:prstGeom>
+        </p:spPr>
+        <p:txBody>
+          <a:bodyPr anchorCtr="0" anchor="t" bIns="91425" lIns="91425" spcFirstLastPara="1" rIns="91425" wrap="square" tIns="91425">
+            <a:normAutofit/>
+          </a:bodyPr>
+          <a:lstStyle/>
+          <a:p>
+            <a:pPr indent="0" lvl="0" marL="0" rtl="0" algn="l">
+              <a:spcBef>
+                <a:spcPts val="0"/>
+              </a:spcBef>
+              <a:spcAft>
+                <a:spcPts val="1200"/>
+              </a:spcAft>
+              <a:buNone/>
+            </a:pPr>
+            <a:r>
+              <a:t/>
+            </a:r>
+            <a:endParaRPr/>
+          </a:p>
+        </p:txBody>
+      </p:sp>
+      <p:pic>
+        <p:nvPicPr>
+          <p:cNvPr id="110" name="Google Shape;110;p22"/>
+          <p:cNvPicPr preferRelativeResize="0"/>
+          <p:nvPr/>
+        </p:nvPicPr>
+        <p:blipFill>
+          <a:blip r:embed="rId3">
+            <a:alphaModFix/>
+          </a:blip>
+          <a:stretch>
+            <a:fillRect/>
+          </a:stretch>
+        </p:blipFill>
+        <p:spPr>
+          <a:xfrm>
+            <a:off x="311700" y="101175"/>
+            <a:ext cx="8520601" cy="1841900"/>
+          </a:xfrm>
+          <a:prstGeom prst="rect">
+            <a:avLst/>
+          </a:prstGeom>
+          <a:noFill/>
+          <a:ln>
+            <a:noFill/>
+          </a:ln>
+        </p:spPr>
+      </p:pic>
+      <p:pic>
+        <p:nvPicPr>
+          <p:cNvPr id="111" name="Google Shape;111;p22"/>
+          <p:cNvPicPr preferRelativeResize="0"/>
+          <p:nvPr/>
+        </p:nvPicPr>
+        <p:blipFill>
+          <a:blip r:embed="rId4">
+            <a:alphaModFix/>
+          </a:blip>
+          <a:stretch>
+            <a:fillRect/>
+          </a:stretch>
+        </p:blipFill>
+        <p:spPr>
+          <a:xfrm>
+            <a:off x="439079" y="1943075"/>
+            <a:ext cx="8151900" cy="1543050"/>
+          </a:xfrm>
+          <a:prstGeom prst="rect">
+            <a:avLst/>
+          </a:prstGeom>
+          <a:noFill/>
+          <a:ln>
+            <a:noFill/>
+          </a:ln>
+        </p:spPr>
+      </p:pic>
+      <p:pic>
+        <p:nvPicPr>
+          <p:cNvPr id="112" name="Google Shape;112;p22"/>
+          <p:cNvPicPr preferRelativeResize="0"/>
+          <p:nvPr/>
+        </p:nvPicPr>
+        <p:blipFill>
+          <a:blip r:embed="rId5">
+            <a:alphaModFix/>
+          </a:blip>
+          <a:stretch>
+            <a:fillRect/>
+          </a:stretch>
+        </p:blipFill>
+        <p:spPr>
+          <a:xfrm>
+            <a:off x="0" y="3508603"/>
+            <a:ext cx="9144000" cy="1634894"/>
+          </a:xfrm>
+          <a:prstGeom prst="rect">
+            <a:avLst/>
+          </a:prstGeom>
+          <a:noFill/>
+          <a:ln>
+            <a:noFill/>
+          </a:ln>
+        </p:spPr>
+      </p:pic>
+    </p:spTree>
+  </p:cSld>
+  <p:clrMapOvr>
+    <a:masterClrMapping/>
+  </p:clrMapOvr>
+</p:sld>
+</file>
+
+<file path=ppt/slides/slide11.xml><?xml version="1.0" encoding="utf-8"?>
+<p:sld xmlns:a="http://schemas.openxmlformats.org/drawingml/2006/main" xmlns:r="http://schemas.openxmlformats.org/officeDocument/2006/relationships" xmlns:mc="http://schemas.openxmlformats.org/markup-compatibility/2006" xmlns:mv="urn:schemas-microsoft-com:mac:vml" xmlns:p="http://schemas.openxmlformats.org/presentationml/2006/main" xmlns:c="http://schemas.openxmlformats.org/drawingml/2006/chart" xmlns:dgm="http://schemas.openxmlformats.org/drawingml/2006/diagram" xmlns:o="urn:schemas-microsoft-com:office:office" xmlns:v="urn:schemas-microsoft-com:vml" xmlns:pvml="urn:schemas-microsoft-com:office:powerpoint" xmlns:com="http://schemas.openxmlformats.org/drawingml/2006/compatibility" xmlns:p14="http://schemas.microsoft.com/office/powerpoint/2010/main" xmlns:p15="http://schemas.microsoft.com/office/powerpoint/2012/main" xmlns:ahyp="http://schemas.microsoft.com/office/drawing/2018/hyperlinkcolor">
+  <p:cSld>
+    <p:spTree>
+      <p:nvGrpSpPr>
+        <p:cNvPr id="116" name="Shape 116"/>
+        <p:cNvGrpSpPr/>
+        <p:nvPr/>
+      </p:nvGrpSpPr>
+      <p:grpSpPr>
+        <a:xfrm>
+          <a:off x="0" y="0"/>
+          <a:ext cx="0" cy="0"/>
+          <a:chOff x="0" y="0"/>
+          <a:chExt cx="0" cy="0"/>
+        </a:xfrm>
+      </p:grpSpPr>
+      <p:sp>
+        <p:nvSpPr>
+          <p:cNvPr id="117" name="Google Shape;117;p23"/>
+          <p:cNvSpPr txBox="1"/>
+          <p:nvPr>
+            <p:ph idx="1" type="body"/>
+          </p:nvPr>
+        </p:nvSpPr>
+        <p:spPr>
+          <a:xfrm>
+            <a:off x="311700" y="305950"/>
+            <a:ext cx="8520600" cy="4263000"/>
+          </a:xfrm>
+          <a:prstGeom prst="rect">
+            <a:avLst/>
+          </a:prstGeom>
+        </p:spPr>
+        <p:txBody>
+          <a:bodyPr anchorCtr="0" anchor="t" bIns="91425" lIns="91425" spcFirstLastPara="1" rIns="91425" wrap="square" tIns="91425">
+            <a:normAutofit/>
+          </a:bodyPr>
+          <a:lstStyle/>
+          <a:p>
+            <a:pPr indent="0" lvl="0" marL="0" rtl="0" algn="l">
+              <a:spcBef>
+                <a:spcPts val="0"/>
+              </a:spcBef>
+              <a:spcAft>
+                <a:spcPts val="1200"/>
+              </a:spcAft>
+              <a:buNone/>
+            </a:pPr>
+            <a:r>
+              <a:t/>
+            </a:r>
+            <a:endParaRPr/>
+          </a:p>
+        </p:txBody>
+      </p:sp>
+      <p:pic>
+        <p:nvPicPr>
+          <p:cNvPr id="118" name="Google Shape;118;p23"/>
+          <p:cNvPicPr preferRelativeResize="0"/>
+          <p:nvPr/>
+        </p:nvPicPr>
+        <p:blipFill>
+          <a:blip r:embed="rId3">
+            <a:alphaModFix/>
+          </a:blip>
+          <a:stretch>
+            <a:fillRect/>
+          </a:stretch>
+        </p:blipFill>
+        <p:spPr>
+          <a:xfrm>
+            <a:off x="0" y="185502"/>
+            <a:ext cx="9144001" cy="1602075"/>
+          </a:xfrm>
+          <a:prstGeom prst="rect">
+            <a:avLst/>
+          </a:prstGeom>
+          <a:noFill/>
+          <a:ln>
+            <a:noFill/>
+          </a:ln>
+        </p:spPr>
+      </p:pic>
+      <p:pic>
+        <p:nvPicPr>
+          <p:cNvPr id="119" name="Google Shape;119;p23"/>
+          <p:cNvPicPr preferRelativeResize="0"/>
+          <p:nvPr/>
+        </p:nvPicPr>
+        <p:blipFill>
+          <a:blip r:embed="rId4">
+            <a:alphaModFix/>
+          </a:blip>
+          <a:stretch>
+            <a:fillRect/>
+          </a:stretch>
+        </p:blipFill>
+        <p:spPr>
+          <a:xfrm>
+            <a:off x="311700" y="1288905"/>
+            <a:ext cx="9144001" cy="919089"/>
+          </a:xfrm>
+          <a:prstGeom prst="rect">
+            <a:avLst/>
+          </a:prstGeom>
+          <a:noFill/>
+          <a:ln>
+            <a:noFill/>
+          </a:ln>
+        </p:spPr>
+      </p:pic>
+      <p:pic>
+        <p:nvPicPr>
+          <p:cNvPr id="120" name="Google Shape;120;p23"/>
+          <p:cNvPicPr preferRelativeResize="0"/>
+          <p:nvPr/>
+        </p:nvPicPr>
+        <p:blipFill>
+          <a:blip r:embed="rId5">
+            <a:alphaModFix/>
+          </a:blip>
+          <a:stretch>
+            <a:fillRect/>
+          </a:stretch>
+        </p:blipFill>
+        <p:spPr>
+          <a:xfrm>
+            <a:off x="311700" y="3618429"/>
+            <a:ext cx="9144001" cy="1459893"/>
+          </a:xfrm>
+          <a:prstGeom prst="rect">
+            <a:avLst/>
+          </a:prstGeom>
+          <a:noFill/>
+          <a:ln>
+            <a:noFill/>
+          </a:ln>
+        </p:spPr>
+      </p:pic>
+      <p:pic>
+        <p:nvPicPr>
+          <p:cNvPr id="121" name="Google Shape;121;p23"/>
+          <p:cNvPicPr preferRelativeResize="0"/>
+          <p:nvPr/>
+        </p:nvPicPr>
+        <p:blipFill>
+          <a:blip r:embed="rId6">
+            <a:alphaModFix/>
+          </a:blip>
+          <a:stretch>
+            <a:fillRect/>
+          </a:stretch>
+        </p:blipFill>
+        <p:spPr>
+          <a:xfrm>
+            <a:off x="311700" y="2323726"/>
+            <a:ext cx="9143999" cy="1178972"/>
+          </a:xfrm>
+          <a:prstGeom prst="rect">
+            <a:avLst/>
+          </a:prstGeom>
+          <a:noFill/>
+          <a:ln>
+            <a:noFill/>
+          </a:ln>
+        </p:spPr>
+      </p:pic>
+    </p:spTree>
+  </p:cSld>
+  <p:clrMapOvr>
+    <a:masterClrMapping/>
+  </p:clrMapOvr>
+</p:sld>
+</file>
+
+<file path=ppt/slides/slide12.xml><?xml version="1.0" encoding="utf-8"?>
+<p:sld xmlns:a="http://schemas.openxmlformats.org/drawingml/2006/main" xmlns:r="http://schemas.openxmlformats.org/officeDocument/2006/relationships" xmlns:mc="http://schemas.openxmlformats.org/markup-compatibility/2006" xmlns:mv="urn:schemas-microsoft-com:mac:vml" xmlns:p="http://schemas.openxmlformats.org/presentationml/2006/main" xmlns:c="http://schemas.openxmlformats.org/drawingml/2006/chart" xmlns:dgm="http://schemas.openxmlformats.org/drawingml/2006/diagram" xmlns:o="urn:schemas-microsoft-com:office:office" xmlns:v="urn:schemas-microsoft-com:vml" xmlns:pvml="urn:schemas-microsoft-com:office:powerpoint" xmlns:com="http://schemas.openxmlformats.org/drawingml/2006/compatibility" xmlns:p14="http://schemas.microsoft.com/office/powerpoint/2010/main" xmlns:p15="http://schemas.microsoft.com/office/powerpoint/2012/main" xmlns:ahyp="http://schemas.microsoft.com/office/drawing/2018/hyperlinkcolor">
+  <p:cSld>
+    <p:spTree>
+      <p:nvGrpSpPr>
+        <p:cNvPr id="125" name="Shape 125"/>
+        <p:cNvGrpSpPr/>
+        <p:nvPr/>
+      </p:nvGrpSpPr>
+      <p:grpSpPr>
+        <a:xfrm>
+          <a:off x="0" y="0"/>
+          <a:ext cx="0" cy="0"/>
+          <a:chOff x="0" y="0"/>
+          <a:chExt cx="0" cy="0"/>
+        </a:xfrm>
+      </p:grpSpPr>
+      <p:sp>
+        <p:nvSpPr>
+          <p:cNvPr id="126" name="Google Shape;126;p24"/>
+          <p:cNvSpPr txBox="1"/>
+          <p:nvPr>
+            <p:ph idx="1" type="body"/>
+          </p:nvPr>
+        </p:nvSpPr>
+        <p:spPr>
+          <a:xfrm>
+            <a:off x="311700" y="257775"/>
+            <a:ext cx="8520600" cy="4311000"/>
+          </a:xfrm>
+          <a:prstGeom prst="rect">
+            <a:avLst/>
+          </a:prstGeom>
+        </p:spPr>
+        <p:txBody>
+          <a:bodyPr anchorCtr="0" anchor="t" bIns="91425" lIns="91425" spcFirstLastPara="1" rIns="91425" wrap="square" tIns="91425">
+            <a:normAutofit/>
+          </a:bodyPr>
+          <a:lstStyle/>
+          <a:p>
+            <a:pPr indent="0" lvl="0" marL="0" rtl="0" algn="l">
+              <a:spcBef>
+                <a:spcPts val="0"/>
+              </a:spcBef>
+              <a:spcAft>
+                <a:spcPts val="1200"/>
+              </a:spcAft>
+              <a:buNone/>
+            </a:pPr>
+            <a:r>
+              <a:t/>
+            </a:r>
+            <a:endParaRPr/>
+          </a:p>
+        </p:txBody>
+      </p:sp>
+      <p:pic>
+        <p:nvPicPr>
+          <p:cNvPr id="127" name="Google Shape;127;p24"/>
+          <p:cNvPicPr preferRelativeResize="0"/>
+          <p:nvPr/>
+        </p:nvPicPr>
+        <p:blipFill>
+          <a:blip r:embed="rId3">
+            <a:alphaModFix/>
+          </a:blip>
+          <a:stretch>
+            <a:fillRect/>
+          </a:stretch>
+        </p:blipFill>
+        <p:spPr>
+          <a:xfrm>
+            <a:off x="311688" y="257775"/>
+            <a:ext cx="7915275" cy="1162050"/>
+          </a:xfrm>
+          <a:prstGeom prst="rect">
+            <a:avLst/>
+          </a:prstGeom>
+          <a:noFill/>
+          <a:ln>
+            <a:noFill/>
+          </a:ln>
+        </p:spPr>
+      </p:pic>
+      <p:pic>
+        <p:nvPicPr>
+          <p:cNvPr id="128" name="Google Shape;128;p24"/>
+          <p:cNvPicPr preferRelativeResize="0"/>
+          <p:nvPr/>
+        </p:nvPicPr>
+        <p:blipFill>
+          <a:blip r:embed="rId4">
+            <a:alphaModFix/>
+          </a:blip>
+          <a:stretch>
+            <a:fillRect/>
+          </a:stretch>
+        </p:blipFill>
+        <p:spPr>
+          <a:xfrm>
+            <a:off x="311700" y="1360425"/>
+            <a:ext cx="1547249" cy="269925"/>
+          </a:xfrm>
+          <a:prstGeom prst="rect">
+            <a:avLst/>
+          </a:prstGeom>
+          <a:noFill/>
+          <a:ln>
+            <a:noFill/>
+          </a:ln>
+        </p:spPr>
+      </p:pic>
+      <p:pic>
+        <p:nvPicPr>
+          <p:cNvPr id="129" name="Google Shape;129;p24"/>
+          <p:cNvPicPr preferRelativeResize="0"/>
+          <p:nvPr/>
+        </p:nvPicPr>
+        <p:blipFill>
+          <a:blip r:embed="rId5">
+            <a:alphaModFix/>
+          </a:blip>
+          <a:stretch>
+            <a:fillRect/>
+          </a:stretch>
+        </p:blipFill>
+        <p:spPr>
+          <a:xfrm>
+            <a:off x="385563" y="1737000"/>
+            <a:ext cx="6067425" cy="1352550"/>
+          </a:xfrm>
+          <a:prstGeom prst="rect">
+            <a:avLst/>
+          </a:prstGeom>
+          <a:noFill/>
+          <a:ln>
+            <a:noFill/>
+          </a:ln>
+        </p:spPr>
+      </p:pic>
+      <p:pic>
+        <p:nvPicPr>
+          <p:cNvPr id="130" name="Google Shape;130;p24"/>
+          <p:cNvPicPr preferRelativeResize="0"/>
+          <p:nvPr/>
+        </p:nvPicPr>
+        <p:blipFill>
+          <a:blip r:embed="rId6">
+            <a:alphaModFix/>
+          </a:blip>
+          <a:stretch>
+            <a:fillRect/>
+          </a:stretch>
+        </p:blipFill>
+        <p:spPr>
+          <a:xfrm>
+            <a:off x="311688" y="3089550"/>
+            <a:ext cx="8696325" cy="1447800"/>
+          </a:xfrm>
+          <a:prstGeom prst="rect">
+            <a:avLst/>
+          </a:prstGeom>
+          <a:noFill/>
+          <a:ln>
+            <a:noFill/>
+          </a:ln>
+        </p:spPr>
+      </p:pic>
+    </p:spTree>
+  </p:cSld>
+  <p:clrMapOvr>
+    <a:masterClrMapping/>
+  </p:clrMapOvr>
+</p:sld>
+</file>
+
+<file path=ppt/slides/slide13.xml><?xml version="1.0" encoding="utf-8"?>
+<p:sld xmlns:a="http://schemas.openxmlformats.org/drawingml/2006/main" xmlns:r="http://schemas.openxmlformats.org/officeDocument/2006/relationships" xmlns:mc="http://schemas.openxmlformats.org/markup-compatibility/2006" xmlns:mv="urn:schemas-microsoft-com:mac:vml" xmlns:p="http://schemas.openxmlformats.org/presentationml/2006/main" xmlns:c="http://schemas.openxmlformats.org/drawingml/2006/chart" xmlns:dgm="http://schemas.openxmlformats.org/drawingml/2006/diagram" xmlns:o="urn:schemas-microsoft-com:office:office" xmlns:v="urn:schemas-microsoft-com:vml" xmlns:pvml="urn:schemas-microsoft-com:office:powerpoint" xmlns:com="http://schemas.openxmlformats.org/drawingml/2006/compatibility" xmlns:p14="http://schemas.microsoft.com/office/powerpoint/2010/main" xmlns:p15="http://schemas.microsoft.com/office/powerpoint/2012/main" xmlns:ahyp="http://schemas.microsoft.com/office/drawing/2018/hyperlinkcolor">
+  <p:cSld>
+    <p:spTree>
+      <p:nvGrpSpPr>
+        <p:cNvPr id="134" name="Shape 134"/>
+        <p:cNvGrpSpPr/>
+        <p:nvPr/>
+      </p:nvGrpSpPr>
+      <p:grpSpPr>
+        <a:xfrm>
+          <a:off x="0" y="0"/>
+          <a:ext cx="0" cy="0"/>
+          <a:chOff x="0" y="0"/>
+          <a:chExt cx="0" cy="0"/>
+        </a:xfrm>
+      </p:grpSpPr>
+      <p:sp>
+        <p:nvSpPr>
+          <p:cNvPr id="135" name="Google Shape;135;p25"/>
+          <p:cNvSpPr txBox="1"/>
+          <p:nvPr>
+            <p:ph idx="1" type="body"/>
+          </p:nvPr>
+        </p:nvSpPr>
+        <p:spPr>
+          <a:xfrm>
+            <a:off x="311700" y="242550"/>
+            <a:ext cx="8520600" cy="4326300"/>
+          </a:xfrm>
+          <a:prstGeom prst="rect">
+            <a:avLst/>
+          </a:prstGeom>
+        </p:spPr>
+        <p:txBody>
+          <a:bodyPr anchorCtr="0" anchor="t" bIns="91425" lIns="91425" spcFirstLastPara="1" rIns="91425" wrap="square" tIns="91425">
+            <a:normAutofit/>
+          </a:bodyPr>
+          <a:lstStyle/>
+          <a:p>
+            <a:pPr indent="0" lvl="0" marL="0" rtl="0" algn="l">
+              <a:spcBef>
+                <a:spcPts val="0"/>
+              </a:spcBef>
+              <a:spcAft>
+                <a:spcPts val="1200"/>
+              </a:spcAft>
+              <a:buNone/>
+            </a:pPr>
+            <a:r>
+              <a:t/>
+            </a:r>
+            <a:endParaRPr/>
+          </a:p>
+        </p:txBody>
+      </p:sp>
+      <p:pic>
+        <p:nvPicPr>
+          <p:cNvPr id="136" name="Google Shape;136;p25"/>
+          <p:cNvPicPr preferRelativeResize="0"/>
+          <p:nvPr/>
+        </p:nvPicPr>
+        <p:blipFill>
+          <a:blip r:embed="rId3">
+            <a:alphaModFix/>
+          </a:blip>
+          <a:stretch>
+            <a:fillRect/>
+          </a:stretch>
+        </p:blipFill>
+        <p:spPr>
+          <a:xfrm>
+            <a:off x="0" y="295625"/>
+            <a:ext cx="9144000" cy="4847875"/>
+          </a:xfrm>
+          <a:prstGeom prst="rect">
+            <a:avLst/>
+          </a:prstGeom>
+          <a:noFill/>
+          <a:ln>
+            <a:noFill/>
+          </a:ln>
+        </p:spPr>
+      </p:pic>
+    </p:spTree>
+  </p:cSld>
+  <p:clrMapOvr>
+    <a:masterClrMapping/>
+  </p:clrMapOvr>
+</p:sld>
+</file>
+
+<file path=ppt/slides/slide14.xml><?xml version="1.0" encoding="utf-8"?>
+<p:sld xmlns:a="http://schemas.openxmlformats.org/drawingml/2006/main" xmlns:r="http://schemas.openxmlformats.org/officeDocument/2006/relationships" xmlns:mc="http://schemas.openxmlformats.org/markup-compatibility/2006" xmlns:mv="urn:schemas-microsoft-com:mac:vml" xmlns:p="http://schemas.openxmlformats.org/presentationml/2006/main" xmlns:c="http://schemas.openxmlformats.org/drawingml/2006/chart" xmlns:dgm="http://schemas.openxmlformats.org/drawingml/2006/diagram" xmlns:o="urn:schemas-microsoft-com:office:office" xmlns:v="urn:schemas-microsoft-com:vml" xmlns:pvml="urn:schemas-microsoft-com:office:powerpoint" xmlns:com="http://schemas.openxmlformats.org/drawingml/2006/compatibility" xmlns:p14="http://schemas.microsoft.com/office/powerpoint/2010/main" xmlns:p15="http://schemas.microsoft.com/office/powerpoint/2012/main" xmlns:ahyp="http://schemas.microsoft.com/office/drawing/2018/hyperlinkcolor">
+  <p:cSld>
+    <p:spTree>
+      <p:nvGrpSpPr>
+        <p:cNvPr id="140" name="Shape 140"/>
+        <p:cNvGrpSpPr/>
+        <p:nvPr/>
+      </p:nvGrpSpPr>
+      <p:grpSpPr>
+        <a:xfrm>
+          <a:off x="0" y="0"/>
+          <a:ext cx="0" cy="0"/>
+          <a:chOff x="0" y="0"/>
+          <a:chExt cx="0" cy="0"/>
+        </a:xfrm>
+      </p:grpSpPr>
+      <p:sp>
+        <p:nvSpPr>
+          <p:cNvPr id="141" name="Google Shape;141;p26"/>
+          <p:cNvSpPr txBox="1"/>
+          <p:nvPr>
+            <p:ph idx="1" type="body"/>
+          </p:nvPr>
+        </p:nvSpPr>
+        <p:spPr>
+          <a:xfrm>
+            <a:off x="311700" y="329175"/>
+            <a:ext cx="8520600" cy="4239600"/>
+          </a:xfrm>
+          <a:prstGeom prst="rect">
+            <a:avLst/>
+          </a:prstGeom>
+        </p:spPr>
+        <p:txBody>
+          <a:bodyPr anchorCtr="0" anchor="t" bIns="91425" lIns="91425" spcFirstLastPara="1" rIns="91425" wrap="square" tIns="91425">
+            <a:normAutofit/>
+          </a:bodyPr>
+          <a:lstStyle/>
+          <a:p>
+            <a:pPr indent="0" lvl="0" marL="0" rtl="0" algn="l">
+              <a:spcBef>
+                <a:spcPts val="0"/>
+              </a:spcBef>
+              <a:spcAft>
+                <a:spcPts val="1200"/>
+              </a:spcAft>
+              <a:buNone/>
+            </a:pPr>
+            <a:r>
+              <a:t/>
+            </a:r>
+            <a:endParaRPr/>
+          </a:p>
+        </p:txBody>
+      </p:sp>
+      <p:pic>
+        <p:nvPicPr>
+          <p:cNvPr id="142" name="Google Shape;142;p26"/>
+          <p:cNvPicPr preferRelativeResize="0"/>
+          <p:nvPr/>
+        </p:nvPicPr>
+        <p:blipFill>
+          <a:blip r:embed="rId3">
+            <a:alphaModFix/>
+          </a:blip>
+          <a:stretch>
+            <a:fillRect/>
+          </a:stretch>
+        </p:blipFill>
+        <p:spPr>
+          <a:xfrm>
+            <a:off x="378839" y="0"/>
+            <a:ext cx="8386323" cy="5143500"/>
+          </a:xfrm>
+          <a:prstGeom prst="rect">
+            <a:avLst/>
+          </a:prstGeom>
+          <a:noFill/>
+          <a:ln>
+            <a:noFill/>
+          </a:ln>
+        </p:spPr>
+      </p:pic>
+    </p:spTree>
+  </p:cSld>
+  <p:clrMapOvr>
+    <a:masterClrMapping/>
+  </p:clrMapOvr>
+</p:sld>
+</file>
+
+<file path=ppt/slides/slide15.xml><?xml version="1.0" encoding="utf-8"?>
+<p:sld xmlns:a="http://schemas.openxmlformats.org/drawingml/2006/main" xmlns:r="http://schemas.openxmlformats.org/officeDocument/2006/relationships" xmlns:mc="http://schemas.openxmlformats.org/markup-compatibility/2006" xmlns:mv="urn:schemas-microsoft-com:mac:vml" xmlns:p="http://schemas.openxmlformats.org/presentationml/2006/main" xmlns:c="http://schemas.openxmlformats.org/drawingml/2006/chart" xmlns:dgm="http://schemas.openxmlformats.org/drawingml/2006/diagram" xmlns:o="urn:schemas-microsoft-com:office:office" xmlns:v="urn:schemas-microsoft-com:vml" xmlns:pvml="urn:schemas-microsoft-com:office:powerpoint" xmlns:com="http://schemas.openxmlformats.org/drawingml/2006/compatibility" xmlns:p14="http://schemas.microsoft.com/office/powerpoint/2010/main" xmlns:p15="http://schemas.microsoft.com/office/powerpoint/2012/main" xmlns:ahyp="http://schemas.microsoft.com/office/drawing/2018/hyperlinkcolor">
+  <p:cSld>
+    <p:spTree>
+      <p:nvGrpSpPr>
+        <p:cNvPr id="146" name="Shape 146"/>
+        <p:cNvGrpSpPr/>
+        <p:nvPr/>
+      </p:nvGrpSpPr>
+      <p:grpSpPr>
+        <a:xfrm>
+          <a:off x="0" y="0"/>
+          <a:ext cx="0" cy="0"/>
+          <a:chOff x="0" y="0"/>
+          <a:chExt cx="0" cy="0"/>
+        </a:xfrm>
+      </p:grpSpPr>
+      <p:sp>
+        <p:nvSpPr>
+          <p:cNvPr id="147" name="Google Shape;147;p27"/>
+          <p:cNvSpPr txBox="1"/>
+          <p:nvPr>
+            <p:ph idx="1" type="body"/>
+          </p:nvPr>
+        </p:nvSpPr>
+        <p:spPr>
+          <a:xfrm>
+            <a:off x="311700" y="242550"/>
+            <a:ext cx="8520600" cy="4326300"/>
+          </a:xfrm>
+          <a:prstGeom prst="rect">
+            <a:avLst/>
+          </a:prstGeom>
+        </p:spPr>
+        <p:txBody>
+          <a:bodyPr anchorCtr="0" anchor="t" bIns="91425" lIns="91425" spcFirstLastPara="1" rIns="91425" wrap="square" tIns="91425">
+            <a:normAutofit/>
+          </a:bodyPr>
+          <a:lstStyle/>
+          <a:p>
+            <a:pPr indent="0" lvl="0" marL="0" rtl="0" algn="l">
+              <a:spcBef>
+                <a:spcPts val="0"/>
+              </a:spcBef>
+              <a:spcAft>
+                <a:spcPts val="1200"/>
+              </a:spcAft>
+              <a:buNone/>
+            </a:pPr>
+            <a:r>
+              <a:t/>
+            </a:r>
+            <a:endParaRPr/>
+          </a:p>
+        </p:txBody>
+      </p:sp>
+      <p:pic>
+        <p:nvPicPr>
+          <p:cNvPr id="148" name="Google Shape;148;p27"/>
+          <p:cNvPicPr preferRelativeResize="0"/>
+          <p:nvPr/>
+        </p:nvPicPr>
+        <p:blipFill>
+          <a:blip r:embed="rId3">
+            <a:alphaModFix/>
+          </a:blip>
+          <a:stretch>
+            <a:fillRect/>
+          </a:stretch>
+        </p:blipFill>
+        <p:spPr>
+          <a:xfrm>
+            <a:off x="311700" y="242550"/>
+            <a:ext cx="8520599" cy="4900950"/>
+          </a:xfrm>
+          <a:prstGeom prst="rect">
+            <a:avLst/>
+          </a:prstGeom>
+          <a:noFill/>
+          <a:ln>
+            <a:noFill/>
+          </a:ln>
+        </p:spPr>
+      </p:pic>
+    </p:spTree>
+  </p:cSld>
+  <p:clrMapOvr>
+    <a:masterClrMapping/>
+  </p:clrMapOvr>
+</p:sld>
+</file>
+
+<file path=ppt/slides/slide16.xml><?xml version="1.0" encoding="utf-8"?>
+<p:sld xmlns:a="http://schemas.openxmlformats.org/drawingml/2006/main" xmlns:r="http://schemas.openxmlformats.org/officeDocument/2006/relationships" xmlns:mc="http://schemas.openxmlformats.org/markup-compatibility/2006" xmlns:mv="urn:schemas-microsoft-com:mac:vml" xmlns:p="http://schemas.openxmlformats.org/presentationml/2006/main" xmlns:c="http://schemas.openxmlformats.org/drawingml/2006/chart" xmlns:dgm="http://schemas.openxmlformats.org/drawingml/2006/diagram" xmlns:o="urn:schemas-microsoft-com:office:office" xmlns:v="urn:schemas-microsoft-com:vml" xmlns:pvml="urn:schemas-microsoft-com:office:powerpoint" xmlns:com="http://schemas.openxmlformats.org/drawingml/2006/compatibility" xmlns:p14="http://schemas.microsoft.com/office/powerpoint/2010/main" xmlns:p15="http://schemas.microsoft.com/office/powerpoint/2012/main" xmlns:ahyp="http://schemas.microsoft.com/office/drawing/2018/hyperlinkcolor">
+  <p:cSld>
+    <p:spTree>
+      <p:nvGrpSpPr>
+        <p:cNvPr id="152" name="Shape 152"/>
+        <p:cNvGrpSpPr/>
+        <p:nvPr/>
+      </p:nvGrpSpPr>
+      <p:grpSpPr>
+        <a:xfrm>
+          <a:off x="0" y="0"/>
+          <a:ext cx="0" cy="0"/>
+          <a:chOff x="0" y="0"/>
+          <a:chExt cx="0" cy="0"/>
+        </a:xfrm>
+      </p:grpSpPr>
+      <p:sp>
+        <p:nvSpPr>
+          <p:cNvPr id="153" name="Google Shape;153;p28"/>
+          <p:cNvSpPr txBox="1"/>
+          <p:nvPr>
+            <p:ph idx="1" type="body"/>
+          </p:nvPr>
+        </p:nvSpPr>
+        <p:spPr>
+          <a:xfrm>
+            <a:off x="311700" y="1152475"/>
+            <a:ext cx="8520600" cy="3416400"/>
+          </a:xfrm>
+          <a:prstGeom prst="rect">
+            <a:avLst/>
+          </a:prstGeom>
+        </p:spPr>
+        <p:txBody>
+          <a:bodyPr anchorCtr="0" anchor="t" bIns="91425" lIns="91425" spcFirstLastPara="1" rIns="91425" wrap="square" tIns="91425">
+            <a:normAutofit/>
+          </a:bodyPr>
+          <a:lstStyle/>
+          <a:p>
+            <a:pPr indent="0" lvl="0" marL="0" rtl="0" algn="l">
+              <a:spcBef>
+                <a:spcPts val="0"/>
+              </a:spcBef>
+              <a:spcAft>
+                <a:spcPts val="1200"/>
+              </a:spcAft>
+              <a:buNone/>
+            </a:pPr>
+            <a:r>
+              <a:t/>
+            </a:r>
+            <a:endParaRPr/>
+          </a:p>
+        </p:txBody>
+      </p:sp>
+      <p:pic>
+        <p:nvPicPr>
+          <p:cNvPr id="154" name="Google Shape;154;p28"/>
+          <p:cNvPicPr preferRelativeResize="0"/>
+          <p:nvPr/>
+        </p:nvPicPr>
+        <p:blipFill>
+          <a:blip r:embed="rId3">
+            <a:alphaModFix/>
+          </a:blip>
+          <a:stretch>
+            <a:fillRect/>
+          </a:stretch>
+        </p:blipFill>
+        <p:spPr>
+          <a:xfrm>
+            <a:off x="0" y="0"/>
+            <a:ext cx="8832301" cy="5143500"/>
+          </a:xfrm>
+          <a:prstGeom prst="rect">
+            <a:avLst/>
+          </a:prstGeom>
+          <a:noFill/>
+          <a:ln>
+            <a:noFill/>
+          </a:ln>
+        </p:spPr>
+      </p:pic>
+    </p:spTree>
+  </p:cSld>
+  <p:clrMapOvr>
+    <a:masterClrMapping/>
+  </p:clrMapOvr>
+</p:sld>
+</file>
+
+<file path=ppt/slides/slide17.xml><?xml version="1.0" encoding="utf-8"?>
+<p:sld xmlns:a="http://schemas.openxmlformats.org/drawingml/2006/main" xmlns:r="http://schemas.openxmlformats.org/officeDocument/2006/relationships" xmlns:mc="http://schemas.openxmlformats.org/markup-compatibility/2006" xmlns:mv="urn:schemas-microsoft-com:mac:vml" xmlns:p="http://schemas.openxmlformats.org/presentationml/2006/main" xmlns:c="http://schemas.openxmlformats.org/drawingml/2006/chart" xmlns:dgm="http://schemas.openxmlformats.org/drawingml/2006/diagram" xmlns:o="urn:schemas-microsoft-com:office:office" xmlns:v="urn:schemas-microsoft-com:vml" xmlns:pvml="urn:schemas-microsoft-com:office:powerpoint" xmlns:com="http://schemas.openxmlformats.org/drawingml/2006/compatibility" xmlns:p14="http://schemas.microsoft.com/office/powerpoint/2010/main" xmlns:p15="http://schemas.microsoft.com/office/powerpoint/2012/main" xmlns:ahyp="http://schemas.microsoft.com/office/drawing/2018/hyperlinkcolor">
+  <p:cSld>
+    <p:spTree>
+      <p:nvGrpSpPr>
+        <p:cNvPr id="158" name="Shape 158"/>
+        <p:cNvGrpSpPr/>
+        <p:nvPr/>
+      </p:nvGrpSpPr>
+      <p:grpSpPr>
+        <a:xfrm>
+          <a:off x="0" y="0"/>
+          <a:ext cx="0" cy="0"/>
+          <a:chOff x="0" y="0"/>
+          <a:chExt cx="0" cy="0"/>
+        </a:xfrm>
+      </p:grpSpPr>
+      <p:sp>
+        <p:nvSpPr>
+          <p:cNvPr id="159" name="Google Shape;159;p29"/>
+          <p:cNvSpPr txBox="1"/>
+          <p:nvPr>
+            <p:ph idx="1" type="body"/>
+          </p:nvPr>
+        </p:nvSpPr>
+        <p:spPr>
+          <a:xfrm>
+            <a:off x="311700" y="1152475"/>
+            <a:ext cx="8520600" cy="3416400"/>
+          </a:xfrm>
+          <a:prstGeom prst="rect">
+            <a:avLst/>
+          </a:prstGeom>
+        </p:spPr>
+        <p:txBody>
+          <a:bodyPr anchorCtr="0" anchor="t" bIns="91425" lIns="91425" spcFirstLastPara="1" rIns="91425" wrap="square" tIns="91425">
+            <a:normAutofit/>
+          </a:bodyPr>
+          <a:lstStyle/>
+          <a:p>
+            <a:pPr indent="0" lvl="0" marL="0" rtl="0" algn="l">
+              <a:spcBef>
+                <a:spcPts val="0"/>
+              </a:spcBef>
+              <a:spcAft>
+                <a:spcPts val="1200"/>
+              </a:spcAft>
+              <a:buNone/>
+            </a:pPr>
+            <a:r>
+              <a:t/>
+            </a:r>
+            <a:endParaRPr/>
+          </a:p>
+        </p:txBody>
+      </p:sp>
+      <p:pic>
+        <p:nvPicPr>
+          <p:cNvPr id="160" name="Google Shape;160;p29"/>
+          <p:cNvPicPr preferRelativeResize="0"/>
+          <p:nvPr/>
+        </p:nvPicPr>
+        <p:blipFill>
+          <a:blip r:embed="rId3">
+            <a:alphaModFix/>
+          </a:blip>
+          <a:stretch>
+            <a:fillRect/>
+          </a:stretch>
+        </p:blipFill>
+        <p:spPr>
+          <a:xfrm>
+            <a:off x="311697" y="0"/>
+            <a:ext cx="6991751" cy="5143501"/>
+          </a:xfrm>
+          <a:prstGeom prst="rect">
+            <a:avLst/>
+          </a:prstGeom>
+          <a:noFill/>
+          <a:ln>
+            <a:noFill/>
+          </a:ln>
+        </p:spPr>
+      </p:pic>
+    </p:spTree>
+  </p:cSld>
+  <p:clrMapOvr>
+    <a:masterClrMapping/>
+  </p:clrMapOvr>
+</p:sld>
+</file>
+
+<file path=ppt/slides/slide18.xml><?xml version="1.0" encoding="utf-8"?>
+<p:sld xmlns:a="http://schemas.openxmlformats.org/drawingml/2006/main" xmlns:r="http://schemas.openxmlformats.org/officeDocument/2006/relationships" xmlns:mc="http://schemas.openxmlformats.org/markup-compatibility/2006" xmlns:mv="urn:schemas-microsoft-com:mac:vml" xmlns:p="http://schemas.openxmlformats.org/presentationml/2006/main" xmlns:c="http://schemas.openxmlformats.org/drawingml/2006/chart" xmlns:dgm="http://schemas.openxmlformats.org/drawingml/2006/diagram" xmlns:o="urn:schemas-microsoft-com:office:office" xmlns:v="urn:schemas-microsoft-com:vml" xmlns:pvml="urn:schemas-microsoft-com:office:powerpoint" xmlns:com="http://schemas.openxmlformats.org/drawingml/2006/compatibility" xmlns:p14="http://schemas.microsoft.com/office/powerpoint/2010/main" xmlns:p15="http://schemas.microsoft.com/office/powerpoint/2012/main" xmlns:ahyp="http://schemas.microsoft.com/office/drawing/2018/hyperlinkcolor">
+  <p:cSld>
+    <p:spTree>
+      <p:nvGrpSpPr>
+        <p:cNvPr id="164" name="Shape 164"/>
+        <p:cNvGrpSpPr/>
+        <p:nvPr/>
+      </p:nvGrpSpPr>
+      <p:grpSpPr>
+        <a:xfrm>
+          <a:off x="0" y="0"/>
+          <a:ext cx="0" cy="0"/>
+          <a:chOff x="0" y="0"/>
+          <a:chExt cx="0" cy="0"/>
+        </a:xfrm>
+      </p:grpSpPr>
+      <p:sp>
+        <p:nvSpPr>
+          <p:cNvPr id="165" name="Google Shape;165;p30"/>
+          <p:cNvSpPr txBox="1"/>
+          <p:nvPr>
+            <p:ph type="title"/>
+          </p:nvPr>
+        </p:nvSpPr>
+        <p:spPr>
+          <a:xfrm>
+            <a:off x="0" y="0"/>
+            <a:ext cx="8520600" cy="572700"/>
+          </a:xfrm>
+          <a:prstGeom prst="rect">
+            <a:avLst/>
+          </a:prstGeom>
+        </p:spPr>
+        <p:txBody>
+          <a:bodyPr anchorCtr="0" anchor="t" bIns="91425" lIns="91425" spcFirstLastPara="1" rIns="91425" wrap="square" tIns="91425">
+            <a:normAutofit fontScale="90000"/>
+          </a:bodyPr>
+          <a:lstStyle/>
+          <a:p>
+            <a:pPr indent="0" lvl="0" marL="0" rtl="0" algn="l">
+              <a:spcBef>
+                <a:spcPts val="0"/>
+              </a:spcBef>
+              <a:spcAft>
+                <a:spcPts val="0"/>
+              </a:spcAft>
+              <a:buNone/>
+            </a:pPr>
+            <a:r>
+              <a:rPr lang="en"/>
+              <a:t>KNN</a:t>
+            </a:r>
+            <a:endParaRPr/>
+          </a:p>
+        </p:txBody>
+      </p:sp>
+      <p:sp>
+        <p:nvSpPr>
+          <p:cNvPr id="166" name="Google Shape;166;p30"/>
+          <p:cNvSpPr txBox="1"/>
+          <p:nvPr>
+            <p:ph idx="1" type="body"/>
+          </p:nvPr>
+        </p:nvSpPr>
+        <p:spPr>
+          <a:xfrm>
+            <a:off x="0" y="514050"/>
+            <a:ext cx="8520600" cy="1671000"/>
+          </a:xfrm>
+          <a:prstGeom prst="rect">
+            <a:avLst/>
+          </a:prstGeom>
+        </p:spPr>
+        <p:txBody>
+          <a:bodyPr anchorCtr="0" anchor="t" bIns="91425" lIns="91425" spcFirstLastPara="1" rIns="91425" wrap="square" tIns="91425">
+            <a:normAutofit/>
+          </a:bodyPr>
+          <a:lstStyle/>
+          <a:p>
+            <a:pPr indent="0" lvl="0" marL="0" rtl="0" algn="l">
+              <a:spcBef>
+                <a:spcPts val="0"/>
+              </a:spcBef>
+              <a:spcAft>
+                <a:spcPts val="1200"/>
+              </a:spcAft>
+              <a:buNone/>
+            </a:pPr>
+            <a:r>
+              <a:t/>
+            </a:r>
+            <a:endParaRPr/>
+          </a:p>
+        </p:txBody>
+      </p:sp>
+      <p:pic>
+        <p:nvPicPr>
+          <p:cNvPr id="167" name="Google Shape;167;p30"/>
+          <p:cNvPicPr preferRelativeResize="0"/>
+          <p:nvPr/>
+        </p:nvPicPr>
+        <p:blipFill>
+          <a:blip r:embed="rId3">
+            <a:alphaModFix/>
+          </a:blip>
+          <a:stretch>
+            <a:fillRect/>
+          </a:stretch>
+        </p:blipFill>
+        <p:spPr>
+          <a:xfrm>
+            <a:off x="0" y="514056"/>
+            <a:ext cx="9144000" cy="1806788"/>
+          </a:xfrm>
+          <a:prstGeom prst="rect">
+            <a:avLst/>
+          </a:prstGeom>
+          <a:noFill/>
+          <a:ln>
+            <a:noFill/>
+          </a:ln>
+        </p:spPr>
+      </p:pic>
+      <p:sp>
+        <p:nvSpPr>
+          <p:cNvPr id="168" name="Google Shape;168;p30"/>
+          <p:cNvSpPr txBox="1"/>
+          <p:nvPr/>
+        </p:nvSpPr>
+        <p:spPr>
+          <a:xfrm>
+            <a:off x="231250" y="2233275"/>
+            <a:ext cx="6938400" cy="1015800"/>
+          </a:xfrm>
+          <a:prstGeom prst="rect">
+            <a:avLst/>
+          </a:prstGeom>
+          <a:noFill/>
+          <a:ln>
+            <a:noFill/>
+          </a:ln>
+        </p:spPr>
+        <p:txBody>
+          <a:bodyPr anchorCtr="0" anchor="t" bIns="91425" lIns="91425" spcFirstLastPara="1" rIns="91425" wrap="square" tIns="91425">
+            <a:spAutoFit/>
+          </a:bodyPr>
+          <a:lstStyle/>
+          <a:p>
+            <a:pPr indent="0" lvl="0" marL="0" rtl="0" algn="l">
+              <a:spcBef>
+                <a:spcPts val="0"/>
+              </a:spcBef>
+              <a:spcAft>
+                <a:spcPts val="0"/>
+              </a:spcAft>
+              <a:buNone/>
+            </a:pPr>
+            <a:r>
+              <a:rPr lang="en" sz="1800">
+                <a:solidFill>
+                  <a:schemeClr val="dk2"/>
+                </a:solidFill>
+              </a:rPr>
+              <a:t>Mean - Impacted by outliers</a:t>
+            </a:r>
+            <a:endParaRPr sz="1800">
+              <a:solidFill>
+                <a:schemeClr val="dk2"/>
+              </a:solidFill>
+            </a:endParaRPr>
+          </a:p>
+          <a:p>
+            <a:pPr indent="0" lvl="0" marL="0" rtl="0" algn="l">
+              <a:spcBef>
+                <a:spcPts val="0"/>
+              </a:spcBef>
+              <a:spcAft>
+                <a:spcPts val="0"/>
+              </a:spcAft>
+              <a:buNone/>
+            </a:pPr>
+            <a:r>
+              <a:rPr lang="en" sz="1800">
+                <a:solidFill>
+                  <a:schemeClr val="dk2"/>
+                </a:solidFill>
+              </a:rPr>
+              <a:t>Median - Centralized Value</a:t>
+            </a:r>
+            <a:endParaRPr sz="1800">
+              <a:solidFill>
+                <a:schemeClr val="dk2"/>
+              </a:solidFill>
+            </a:endParaRPr>
+          </a:p>
+          <a:p>
+            <a:pPr indent="0" lvl="0" marL="0" rtl="0" algn="l">
+              <a:spcBef>
+                <a:spcPts val="0"/>
+              </a:spcBef>
+              <a:spcAft>
+                <a:spcPts val="0"/>
+              </a:spcAft>
+              <a:buNone/>
+            </a:pPr>
+            <a:r>
+              <a:rPr lang="en" sz="1800">
+                <a:solidFill>
+                  <a:schemeClr val="dk2"/>
+                </a:solidFill>
+              </a:rPr>
+              <a:t>Mode - Frequent value for categorical value.</a:t>
+            </a:r>
+            <a:endParaRPr sz="1800">
+              <a:solidFill>
+                <a:schemeClr val="dk2"/>
+              </a:solidFill>
+            </a:endParaRPr>
+          </a:p>
+        </p:txBody>
+      </p:sp>
+      <p:pic>
+        <p:nvPicPr>
+          <p:cNvPr id="169" name="Google Shape;169;p30"/>
+          <p:cNvPicPr preferRelativeResize="0"/>
+          <p:nvPr/>
+        </p:nvPicPr>
+        <p:blipFill>
+          <a:blip r:embed="rId4">
+            <a:alphaModFix/>
+          </a:blip>
+          <a:stretch>
+            <a:fillRect/>
+          </a:stretch>
+        </p:blipFill>
+        <p:spPr>
+          <a:xfrm>
+            <a:off x="152400" y="3401475"/>
+            <a:ext cx="8258175" cy="1476375"/>
+          </a:xfrm>
+          <a:prstGeom prst="rect">
+            <a:avLst/>
+          </a:prstGeom>
+          <a:noFill/>
+          <a:ln>
+            <a:noFill/>
+          </a:ln>
+        </p:spPr>
+      </p:pic>
+    </p:spTree>
+  </p:cSld>
+  <p:clrMapOvr>
+    <a:masterClrMapping/>
+  </p:clrMapOvr>
+</p:sld>
+</file>
+
+<file path=ppt/slides/slide19.xml><?xml version="1.0" encoding="utf-8"?>
+<p:sld xmlns:a="http://schemas.openxmlformats.org/drawingml/2006/main" xmlns:r="http://schemas.openxmlformats.org/officeDocument/2006/relationships" xmlns:mc="http://schemas.openxmlformats.org/markup-compatibility/2006" xmlns:mv="urn:schemas-microsoft-com:mac:vml" xmlns:p="http://schemas.openxmlformats.org/presentationml/2006/main" xmlns:c="http://schemas.openxmlformats.org/drawingml/2006/chart" xmlns:dgm="http://schemas.openxmlformats.org/drawingml/2006/diagram" xmlns:o="urn:schemas-microsoft-com:office:office" xmlns:v="urn:schemas-microsoft-com:vml" xmlns:pvml="urn:schemas-microsoft-com:office:powerpoint" xmlns:com="http://schemas.openxmlformats.org/drawingml/2006/compatibility" xmlns:p14="http://schemas.microsoft.com/office/powerpoint/2010/main" xmlns:p15="http://schemas.microsoft.com/office/powerpoint/2012/main" xmlns:ahyp="http://schemas.microsoft.com/office/drawing/2018/hyperlinkcolor">
+  <p:cSld>
+    <p:spTree>
+      <p:nvGrpSpPr>
+        <p:cNvPr id="173" name="Shape 173"/>
+        <p:cNvGrpSpPr/>
+        <p:nvPr/>
+      </p:nvGrpSpPr>
+      <p:grpSpPr>
+        <a:xfrm>
+          <a:off x="0" y="0"/>
+          <a:ext cx="0" cy="0"/>
+          <a:chOff x="0" y="0"/>
+          <a:chExt cx="0" cy="0"/>
+        </a:xfrm>
+      </p:grpSpPr>
+      <p:pic>
+        <p:nvPicPr>
+          <p:cNvPr id="174" name="Google Shape;174;p31"/>
+          <p:cNvPicPr preferRelativeResize="0"/>
+          <p:nvPr/>
+        </p:nvPicPr>
+        <p:blipFill>
+          <a:blip r:embed="rId3">
+            <a:alphaModFix/>
+          </a:blip>
+          <a:stretch>
+            <a:fillRect/>
+          </a:stretch>
+        </p:blipFill>
+        <p:spPr>
+          <a:xfrm>
+            <a:off x="-12" y="0"/>
+            <a:ext cx="9058275" cy="2171700"/>
+          </a:xfrm>
+          <a:prstGeom prst="rect">
+            <a:avLst/>
+          </a:prstGeom>
+          <a:noFill/>
+          <a:ln>
+            <a:noFill/>
+          </a:ln>
+        </p:spPr>
+      </p:pic>
+      <p:sp>
+        <p:nvSpPr>
+          <p:cNvPr id="175" name="Google Shape;175;p31"/>
+          <p:cNvSpPr txBox="1"/>
+          <p:nvPr/>
+        </p:nvSpPr>
+        <p:spPr>
+          <a:xfrm>
+            <a:off x="303550" y="2426000"/>
+            <a:ext cx="6938400" cy="354000"/>
+          </a:xfrm>
+          <a:prstGeom prst="rect">
+            <a:avLst/>
+          </a:prstGeom>
+          <a:noFill/>
+          <a:ln>
+            <a:noFill/>
+          </a:ln>
+        </p:spPr>
+        <p:txBody>
+          <a:bodyPr anchorCtr="0" anchor="t" bIns="91425" lIns="91425" spcFirstLastPara="1" rIns="91425" wrap="square" tIns="91425">
+            <a:spAutoFit/>
+          </a:bodyPr>
+          <a:lstStyle/>
+          <a:p>
+            <a:pPr indent="0" lvl="0" marL="0" rtl="0" algn="l">
+              <a:spcBef>
+                <a:spcPts val="0"/>
+              </a:spcBef>
+              <a:spcAft>
+                <a:spcPts val="0"/>
+              </a:spcAft>
+              <a:buNone/>
+            </a:pPr>
+            <a:r>
+              <a:rPr lang="en" sz="1100">
+                <a:solidFill>
+                  <a:srgbClr val="188038"/>
+                </a:solidFill>
+                <a:latin typeface="Roboto Mono"/>
+                <a:ea typeface="Roboto Mono"/>
+                <a:cs typeface="Roboto Mono"/>
+                <a:sym typeface="Roboto Mono"/>
+              </a:rPr>
+              <a:t>random_state=42</a:t>
+            </a:r>
+            <a:r>
+              <a:rPr lang="en" sz="1100">
+                <a:solidFill>
+                  <a:schemeClr val="dk1"/>
+                </a:solidFill>
+              </a:rPr>
+              <a:t> means the data will be split the </a:t>
+            </a:r>
+            <a:r>
+              <a:rPr i="1" lang="en" sz="1100">
+                <a:solidFill>
+                  <a:schemeClr val="dk1"/>
+                </a:solidFill>
+              </a:rPr>
+              <a:t>same way every time</a:t>
+            </a:r>
+            <a:endParaRPr sz="1800">
+              <a:solidFill>
+                <a:schemeClr val="dk2"/>
+              </a:solidFill>
+            </a:endParaRPr>
+          </a:p>
+        </p:txBody>
+      </p:sp>
+      <p:sp>
+        <p:nvSpPr>
+          <p:cNvPr id="176" name="Google Shape;176;p31"/>
+          <p:cNvSpPr txBox="1"/>
+          <p:nvPr/>
+        </p:nvSpPr>
+        <p:spPr>
+          <a:xfrm>
+            <a:off x="156600" y="2939150"/>
+            <a:ext cx="8422200" cy="523200"/>
+          </a:xfrm>
+          <a:prstGeom prst="rect">
+            <a:avLst/>
+          </a:prstGeom>
+          <a:noFill/>
+          <a:ln>
+            <a:noFill/>
+          </a:ln>
+        </p:spPr>
+        <p:txBody>
+          <a:bodyPr anchorCtr="0" anchor="t" bIns="91425" lIns="91425" spcFirstLastPara="1" rIns="91425" wrap="square" tIns="91425">
+            <a:spAutoFit/>
+          </a:bodyPr>
+          <a:lstStyle/>
+          <a:p>
+            <a:pPr indent="0" lvl="0" marL="0" rtl="0" algn="l">
+              <a:spcBef>
+                <a:spcPts val="0"/>
+              </a:spcBef>
+              <a:spcAft>
+                <a:spcPts val="0"/>
+              </a:spcAft>
+              <a:buNone/>
+            </a:pPr>
+            <a:r>
+              <a:rPr b="1" lang="en" sz="1100">
+                <a:solidFill>
+                  <a:schemeClr val="dk1"/>
+                </a:solidFill>
+              </a:rPr>
+              <a:t>RandomForestRegressor</a:t>
+            </a:r>
+            <a:r>
+              <a:rPr lang="en" sz="1100">
+                <a:solidFill>
+                  <a:schemeClr val="dk1"/>
+                </a:solidFill>
+              </a:rPr>
+              <a:t> is an ensemble model that builds multiple decision trees and averages their predictions to predict continuous numerical values. It reduces overfitting compared to a single tree and works well on noisy or complex datasets.</a:t>
+            </a:r>
+            <a:endParaRPr/>
+          </a:p>
+        </p:txBody>
+      </p:sp>
+    </p:spTree>
+  </p:cSld>
+  <p:clrMapOvr>
+    <a:masterClrMapping/>
+  </p:clrMapOvr>
+</p:sld>
+</file>
+
 <file path=ppt/slides/slide2.xml><?xml version="1.0" encoding="utf-8"?>
 <p:sld xmlns:a="http://schemas.openxmlformats.org/drawingml/2006/main" xmlns:r="http://schemas.openxmlformats.org/officeDocument/2006/relationships" xmlns:mc="http://schemas.openxmlformats.org/markup-compatibility/2006" xmlns:mv="urn:schemas-microsoft-com:mac:vml" xmlns:p="http://schemas.openxmlformats.org/presentationml/2006/main" xmlns:c="http://schemas.openxmlformats.org/drawingml/2006/chart" xmlns:dgm="http://schemas.openxmlformats.org/drawingml/2006/diagram" xmlns:o="urn:schemas-microsoft-com:office:office" xmlns:v="urn:schemas-microsoft-com:vml" xmlns:pvml="urn:schemas-microsoft-com:office:powerpoint" xmlns:com="http://schemas.openxmlformats.org/drawingml/2006/compatibility" xmlns:p14="http://schemas.microsoft.com/office/powerpoint/2010/main" xmlns:p15="http://schemas.microsoft.com/office/powerpoint/2012/main" xmlns:ahyp="http://schemas.microsoft.com/office/drawing/2018/hyperlinkcolor">
   <p:cSld>
@@ -5921,6 +8725,597 @@
           <p:cNvPr id="59" name="Google Shape;59;p14"/>
           <p:cNvSpPr txBox="1"/>
           <p:nvPr>
+            <p:ph idx="1" type="subTitle"/>
+          </p:nvPr>
+        </p:nvSpPr>
+        <p:spPr>
+          <a:xfrm>
+            <a:off x="311700" y="173450"/>
+            <a:ext cx="8520600" cy="4710000"/>
+          </a:xfrm>
+          <a:prstGeom prst="rect">
+            <a:avLst/>
+          </a:prstGeom>
+        </p:spPr>
+        <p:txBody>
+          <a:bodyPr anchorCtr="0" anchor="t" bIns="91425" lIns="91425" spcFirstLastPara="1" rIns="91425" wrap="square" tIns="91425">
+            <a:normAutofit/>
+          </a:bodyPr>
+          <a:lstStyle/>
+          <a:p>
+            <a:pPr indent="0" lvl="0" marL="0" rtl="0" algn="l">
+              <a:spcBef>
+                <a:spcPts val="0"/>
+              </a:spcBef>
+              <a:spcAft>
+                <a:spcPts val="0"/>
+              </a:spcAft>
+              <a:buNone/>
+            </a:pPr>
+            <a:r>
+              <a:rPr b="1" lang="en" sz="1800"/>
+              <a:t>Topics Covered</a:t>
+            </a:r>
+            <a:endParaRPr b="1" sz="1800"/>
+          </a:p>
+          <a:p>
+            <a:pPr indent="0" lvl="0" marL="0" rtl="0" algn="l">
+              <a:spcBef>
+                <a:spcPts val="0"/>
+              </a:spcBef>
+              <a:spcAft>
+                <a:spcPts val="0"/>
+              </a:spcAft>
+              <a:buNone/>
+            </a:pPr>
+            <a:r>
+              <a:t/>
+            </a:r>
+            <a:endParaRPr sz="1800"/>
+          </a:p>
+          <a:p>
+            <a:pPr indent="0" lvl="0" marL="0" rtl="0" algn="l">
+              <a:spcBef>
+                <a:spcPts val="0"/>
+              </a:spcBef>
+              <a:spcAft>
+                <a:spcPts val="0"/>
+              </a:spcAft>
+              <a:buNone/>
+            </a:pPr>
+            <a:r>
+              <a:rPr lang="en" sz="1800"/>
+              <a:t>KNN Model </a:t>
+            </a:r>
+            <a:endParaRPr sz="1800"/>
+          </a:p>
+          <a:p>
+            <a:pPr indent="0" lvl="0" marL="0" rtl="0" algn="l">
+              <a:spcBef>
+                <a:spcPts val="0"/>
+              </a:spcBef>
+              <a:spcAft>
+                <a:spcPts val="0"/>
+              </a:spcAft>
+              <a:buNone/>
+            </a:pPr>
+            <a:r>
+              <a:rPr lang="en" sz="1800"/>
+              <a:t>Getting the data ready</a:t>
+            </a:r>
+            <a:endParaRPr sz="1800"/>
+          </a:p>
+          <a:p>
+            <a:pPr indent="0" lvl="0" marL="0" rtl="0" algn="l">
+              <a:spcBef>
+                <a:spcPts val="0"/>
+              </a:spcBef>
+              <a:spcAft>
+                <a:spcPts val="0"/>
+              </a:spcAft>
+              <a:buNone/>
+            </a:pPr>
+            <a:r>
+              <a:rPr lang="en" sz="1800"/>
+              <a:t>Treating Missing Values </a:t>
+            </a:r>
+            <a:endParaRPr sz="1800"/>
+          </a:p>
+          <a:p>
+            <a:pPr indent="0" lvl="0" marL="0" rtl="0" algn="l">
+              <a:spcBef>
+                <a:spcPts val="0"/>
+              </a:spcBef>
+              <a:spcAft>
+                <a:spcPts val="0"/>
+              </a:spcAft>
+              <a:buNone/>
+            </a:pPr>
+            <a:r>
+              <a:rPr lang="en" sz="1800"/>
+              <a:t>Outliers</a:t>
+            </a:r>
+            <a:endParaRPr sz="1800"/>
+          </a:p>
+          <a:p>
+            <a:pPr indent="0" lvl="0" marL="0" rtl="0" algn="l">
+              <a:spcBef>
+                <a:spcPts val="0"/>
+              </a:spcBef>
+              <a:spcAft>
+                <a:spcPts val="0"/>
+              </a:spcAft>
+              <a:buNone/>
+            </a:pPr>
+            <a:r>
+              <a:rPr lang="en" sz="1800"/>
+              <a:t>Confusion Metrix</a:t>
+            </a:r>
+            <a:endParaRPr sz="1800"/>
+          </a:p>
+          <a:p>
+            <a:pPr indent="0" lvl="0" marL="0" rtl="0" algn="l">
+              <a:spcBef>
+                <a:spcPts val="0"/>
+              </a:spcBef>
+              <a:spcAft>
+                <a:spcPts val="0"/>
+              </a:spcAft>
+              <a:buNone/>
+            </a:pPr>
+            <a:r>
+              <a:rPr lang="en" sz="1800"/>
+              <a:t>Accuracy </a:t>
+            </a:r>
+            <a:endParaRPr sz="1800"/>
+          </a:p>
+          <a:p>
+            <a:pPr indent="0" lvl="0" marL="0" rtl="0" algn="l">
+              <a:spcBef>
+                <a:spcPts val="0"/>
+              </a:spcBef>
+              <a:spcAft>
+                <a:spcPts val="0"/>
+              </a:spcAft>
+              <a:buNone/>
+            </a:pPr>
+            <a:r>
+              <a:rPr lang="en" sz="1800"/>
+              <a:t>Precision</a:t>
+            </a:r>
+            <a:endParaRPr sz="1800"/>
+          </a:p>
+          <a:p>
+            <a:pPr indent="0" lvl="0" marL="0" rtl="0" algn="l">
+              <a:spcBef>
+                <a:spcPts val="0"/>
+              </a:spcBef>
+              <a:spcAft>
+                <a:spcPts val="0"/>
+              </a:spcAft>
+              <a:buNone/>
+            </a:pPr>
+            <a:r>
+              <a:rPr lang="en" sz="1800"/>
+              <a:t>Recall</a:t>
+            </a:r>
+            <a:endParaRPr sz="1800"/>
+          </a:p>
+          <a:p>
+            <a:pPr indent="0" lvl="0" marL="0" rtl="0" algn="l">
+              <a:spcBef>
+                <a:spcPts val="0"/>
+              </a:spcBef>
+              <a:spcAft>
+                <a:spcPts val="0"/>
+              </a:spcAft>
+              <a:buNone/>
+            </a:pPr>
+            <a:r>
+              <a:rPr lang="en" sz="1800"/>
+              <a:t>AUC Curve</a:t>
+            </a:r>
+            <a:endParaRPr sz="1800"/>
+          </a:p>
+          <a:p>
+            <a:pPr indent="0" lvl="0" marL="0" rtl="0" algn="l">
+              <a:spcBef>
+                <a:spcPts val="0"/>
+              </a:spcBef>
+              <a:spcAft>
+                <a:spcPts val="0"/>
+              </a:spcAft>
+              <a:buNone/>
+            </a:pPr>
+            <a:r>
+              <a:rPr lang="en" sz="1800"/>
+              <a:t>Cross validation</a:t>
+            </a:r>
+            <a:endParaRPr sz="1800"/>
+          </a:p>
+          <a:p>
+            <a:pPr indent="0" lvl="0" marL="0" rtl="0" algn="l">
+              <a:spcBef>
+                <a:spcPts val="0"/>
+              </a:spcBef>
+              <a:spcAft>
+                <a:spcPts val="0"/>
+              </a:spcAft>
+              <a:buNone/>
+            </a:pPr>
+            <a:r>
+              <a:rPr lang="en" sz="1800"/>
+              <a:t>Benchmark models</a:t>
+            </a:r>
+            <a:endParaRPr sz="1800"/>
+          </a:p>
+          <a:p>
+            <a:pPr indent="0" lvl="0" marL="0" rtl="0" algn="l">
+              <a:spcBef>
+                <a:spcPts val="0"/>
+              </a:spcBef>
+              <a:spcAft>
+                <a:spcPts val="0"/>
+              </a:spcAft>
+              <a:buClr>
+                <a:schemeClr val="dk1"/>
+              </a:buClr>
+              <a:buSzPts val="1100"/>
+              <a:buFont typeface="Arial"/>
+              <a:buNone/>
+            </a:pPr>
+            <a:r>
+              <a:rPr lang="en" sz="1800"/>
+              <a:t>EDA techniques</a:t>
+            </a:r>
+            <a:endParaRPr sz="1800"/>
+          </a:p>
+          <a:p>
+            <a:pPr indent="0" lvl="0" marL="0" rtl="0" algn="l">
+              <a:spcBef>
+                <a:spcPts val="0"/>
+              </a:spcBef>
+              <a:spcAft>
+                <a:spcPts val="0"/>
+              </a:spcAft>
+              <a:buNone/>
+            </a:pPr>
+            <a:r>
+              <a:t/>
+            </a:r>
+            <a:endParaRPr sz="1800"/>
+          </a:p>
+        </p:txBody>
+      </p:sp>
+    </p:spTree>
+  </p:cSld>
+  <p:clrMapOvr>
+    <a:masterClrMapping/>
+  </p:clrMapOvr>
+</p:sld>
+</file>
+
+<file path=ppt/slides/slide3.xml><?xml version="1.0" encoding="utf-8"?>
+<p:sld xmlns:a="http://schemas.openxmlformats.org/drawingml/2006/main" xmlns:r="http://schemas.openxmlformats.org/officeDocument/2006/relationships" xmlns:mc="http://schemas.openxmlformats.org/markup-compatibility/2006" xmlns:mv="urn:schemas-microsoft-com:mac:vml" xmlns:p="http://schemas.openxmlformats.org/presentationml/2006/main" xmlns:c="http://schemas.openxmlformats.org/drawingml/2006/chart" xmlns:dgm="http://schemas.openxmlformats.org/drawingml/2006/diagram" xmlns:o="urn:schemas-microsoft-com:office:office" xmlns:v="urn:schemas-microsoft-com:vml" xmlns:pvml="urn:schemas-microsoft-com:office:powerpoint" xmlns:com="http://schemas.openxmlformats.org/drawingml/2006/compatibility" xmlns:p14="http://schemas.microsoft.com/office/powerpoint/2010/main" xmlns:p15="http://schemas.microsoft.com/office/powerpoint/2012/main" xmlns:ahyp="http://schemas.microsoft.com/office/drawing/2018/hyperlinkcolor">
+  <p:cSld>
+    <p:spTree>
+      <p:nvGrpSpPr>
+        <p:cNvPr id="63" name="Shape 63"/>
+        <p:cNvGrpSpPr/>
+        <p:nvPr/>
+      </p:nvGrpSpPr>
+      <p:grpSpPr>
+        <a:xfrm>
+          <a:off x="0" y="0"/>
+          <a:ext cx="0" cy="0"/>
+          <a:chOff x="0" y="0"/>
+          <a:chExt cx="0" cy="0"/>
+        </a:xfrm>
+      </p:grpSpPr>
+      <p:pic>
+        <p:nvPicPr>
+          <p:cNvPr id="64" name="Google Shape;64;p15"/>
+          <p:cNvPicPr preferRelativeResize="0"/>
+          <p:nvPr/>
+        </p:nvPicPr>
+        <p:blipFill>
+          <a:blip r:embed="rId3">
+            <a:alphaModFix/>
+          </a:blip>
+          <a:stretch>
+            <a:fillRect/>
+          </a:stretch>
+        </p:blipFill>
+        <p:spPr>
+          <a:xfrm>
+            <a:off x="0" y="1"/>
+            <a:ext cx="9144000" cy="1270497"/>
+          </a:xfrm>
+          <a:prstGeom prst="rect">
+            <a:avLst/>
+          </a:prstGeom>
+          <a:noFill/>
+          <a:ln>
+            <a:noFill/>
+          </a:ln>
+        </p:spPr>
+      </p:pic>
+      <p:pic>
+        <p:nvPicPr>
+          <p:cNvPr id="65" name="Google Shape;65;p15"/>
+          <p:cNvPicPr preferRelativeResize="0"/>
+          <p:nvPr/>
+        </p:nvPicPr>
+        <p:blipFill>
+          <a:blip r:embed="rId4">
+            <a:alphaModFix/>
+          </a:blip>
+          <a:stretch>
+            <a:fillRect/>
+          </a:stretch>
+        </p:blipFill>
+        <p:spPr>
+          <a:xfrm>
+            <a:off x="257175" y="1270499"/>
+            <a:ext cx="8629650" cy="1543050"/>
+          </a:xfrm>
+          <a:prstGeom prst="rect">
+            <a:avLst/>
+          </a:prstGeom>
+          <a:noFill/>
+          <a:ln>
+            <a:noFill/>
+          </a:ln>
+        </p:spPr>
+      </p:pic>
+      <p:pic>
+        <p:nvPicPr>
+          <p:cNvPr id="66" name="Google Shape;66;p15"/>
+          <p:cNvPicPr preferRelativeResize="0"/>
+          <p:nvPr/>
+        </p:nvPicPr>
+        <p:blipFill>
+          <a:blip r:embed="rId5">
+            <a:alphaModFix/>
+          </a:blip>
+          <a:stretch>
+            <a:fillRect/>
+          </a:stretch>
+        </p:blipFill>
+        <p:spPr>
+          <a:xfrm>
+            <a:off x="152400" y="2965949"/>
+            <a:ext cx="8839200" cy="1726146"/>
+          </a:xfrm>
+          <a:prstGeom prst="rect">
+            <a:avLst/>
+          </a:prstGeom>
+          <a:noFill/>
+          <a:ln>
+            <a:noFill/>
+          </a:ln>
+        </p:spPr>
+      </p:pic>
+    </p:spTree>
+  </p:cSld>
+  <p:clrMapOvr>
+    <a:masterClrMapping/>
+  </p:clrMapOvr>
+</p:sld>
+</file>
+
+<file path=ppt/slides/slide4.xml><?xml version="1.0" encoding="utf-8"?>
+<p:sld xmlns:a="http://schemas.openxmlformats.org/drawingml/2006/main" xmlns:r="http://schemas.openxmlformats.org/officeDocument/2006/relationships" xmlns:mc="http://schemas.openxmlformats.org/markup-compatibility/2006" xmlns:mv="urn:schemas-microsoft-com:mac:vml" xmlns:p="http://schemas.openxmlformats.org/presentationml/2006/main" xmlns:c="http://schemas.openxmlformats.org/drawingml/2006/chart" xmlns:dgm="http://schemas.openxmlformats.org/drawingml/2006/diagram" xmlns:o="urn:schemas-microsoft-com:office:office" xmlns:v="urn:schemas-microsoft-com:vml" xmlns:pvml="urn:schemas-microsoft-com:office:powerpoint" xmlns:com="http://schemas.openxmlformats.org/drawingml/2006/compatibility" xmlns:p14="http://schemas.microsoft.com/office/powerpoint/2010/main" xmlns:p15="http://schemas.microsoft.com/office/powerpoint/2012/main" xmlns:ahyp="http://schemas.microsoft.com/office/drawing/2018/hyperlinkcolor">
+  <p:cSld>
+    <p:spTree>
+      <p:nvGrpSpPr>
+        <p:cNvPr id="70" name="Shape 70"/>
+        <p:cNvGrpSpPr/>
+        <p:nvPr/>
+      </p:nvGrpSpPr>
+      <p:grpSpPr>
+        <a:xfrm>
+          <a:off x="0" y="0"/>
+          <a:ext cx="0" cy="0"/>
+          <a:chOff x="0" y="0"/>
+          <a:chExt cx="0" cy="0"/>
+        </a:xfrm>
+      </p:grpSpPr>
+      <p:pic>
+        <p:nvPicPr>
+          <p:cNvPr id="71" name="Google Shape;71;p16"/>
+          <p:cNvPicPr preferRelativeResize="0"/>
+          <p:nvPr/>
+        </p:nvPicPr>
+        <p:blipFill>
+          <a:blip r:embed="rId3">
+            <a:alphaModFix/>
+          </a:blip>
+          <a:stretch>
+            <a:fillRect/>
+          </a:stretch>
+        </p:blipFill>
+        <p:spPr>
+          <a:xfrm>
+            <a:off x="152400" y="152400"/>
+            <a:ext cx="8839202" cy="1644671"/>
+          </a:xfrm>
+          <a:prstGeom prst="rect">
+            <a:avLst/>
+          </a:prstGeom>
+          <a:noFill/>
+          <a:ln>
+            <a:noFill/>
+          </a:ln>
+        </p:spPr>
+      </p:pic>
+      <p:pic>
+        <p:nvPicPr>
+          <p:cNvPr id="72" name="Google Shape;72;p16"/>
+          <p:cNvPicPr preferRelativeResize="0"/>
+          <p:nvPr/>
+        </p:nvPicPr>
+        <p:blipFill>
+          <a:blip r:embed="rId4">
+            <a:alphaModFix/>
+          </a:blip>
+          <a:stretch>
+            <a:fillRect/>
+          </a:stretch>
+        </p:blipFill>
+        <p:spPr>
+          <a:xfrm>
+            <a:off x="152400" y="1667946"/>
+            <a:ext cx="8839199" cy="1949329"/>
+          </a:xfrm>
+          <a:prstGeom prst="rect">
+            <a:avLst/>
+          </a:prstGeom>
+          <a:noFill/>
+          <a:ln>
+            <a:noFill/>
+          </a:ln>
+        </p:spPr>
+      </p:pic>
+      <p:pic>
+        <p:nvPicPr>
+          <p:cNvPr id="73" name="Google Shape;73;p16"/>
+          <p:cNvPicPr preferRelativeResize="0"/>
+          <p:nvPr/>
+        </p:nvPicPr>
+        <p:blipFill>
+          <a:blip r:embed="rId5">
+            <a:alphaModFix/>
+          </a:blip>
+          <a:stretch>
+            <a:fillRect/>
+          </a:stretch>
+        </p:blipFill>
+        <p:spPr>
+          <a:xfrm>
+            <a:off x="229000" y="3467388"/>
+            <a:ext cx="9143999" cy="1676123"/>
+          </a:xfrm>
+          <a:prstGeom prst="rect">
+            <a:avLst/>
+          </a:prstGeom>
+          <a:noFill/>
+          <a:ln>
+            <a:noFill/>
+          </a:ln>
+        </p:spPr>
+      </p:pic>
+    </p:spTree>
+  </p:cSld>
+  <p:clrMapOvr>
+    <a:masterClrMapping/>
+  </p:clrMapOvr>
+</p:sld>
+</file>
+
+<file path=ppt/slides/slide5.xml><?xml version="1.0" encoding="utf-8"?>
+<p:sld xmlns:a="http://schemas.openxmlformats.org/drawingml/2006/main" xmlns:r="http://schemas.openxmlformats.org/officeDocument/2006/relationships" xmlns:mc="http://schemas.openxmlformats.org/markup-compatibility/2006" xmlns:mv="urn:schemas-microsoft-com:mac:vml" xmlns:p="http://schemas.openxmlformats.org/presentationml/2006/main" xmlns:c="http://schemas.openxmlformats.org/drawingml/2006/chart" xmlns:dgm="http://schemas.openxmlformats.org/drawingml/2006/diagram" xmlns:o="urn:schemas-microsoft-com:office:office" xmlns:v="urn:schemas-microsoft-com:vml" xmlns:pvml="urn:schemas-microsoft-com:office:powerpoint" xmlns:com="http://schemas.openxmlformats.org/drawingml/2006/compatibility" xmlns:p14="http://schemas.microsoft.com/office/powerpoint/2010/main" xmlns:p15="http://schemas.microsoft.com/office/powerpoint/2012/main" xmlns:ahyp="http://schemas.microsoft.com/office/drawing/2018/hyperlinkcolor">
+  <p:cSld>
+    <p:spTree>
+      <p:nvGrpSpPr>
+        <p:cNvPr id="77" name="Shape 77"/>
+        <p:cNvGrpSpPr/>
+        <p:nvPr/>
+      </p:nvGrpSpPr>
+      <p:grpSpPr>
+        <a:xfrm>
+          <a:off x="0" y="0"/>
+          <a:ext cx="0" cy="0"/>
+          <a:chOff x="0" y="0"/>
+          <a:chExt cx="0" cy="0"/>
+        </a:xfrm>
+      </p:grpSpPr>
+      <p:pic>
+        <p:nvPicPr>
+          <p:cNvPr id="78" name="Google Shape;78;p17"/>
+          <p:cNvPicPr preferRelativeResize="0"/>
+          <p:nvPr/>
+        </p:nvPicPr>
+        <p:blipFill>
+          <a:blip r:embed="rId3">
+            <a:alphaModFix/>
+          </a:blip>
+          <a:stretch>
+            <a:fillRect/>
+          </a:stretch>
+        </p:blipFill>
+        <p:spPr>
+          <a:xfrm>
+            <a:off x="152400" y="152400"/>
+            <a:ext cx="8839198" cy="1958589"/>
+          </a:xfrm>
+          <a:prstGeom prst="rect">
+            <a:avLst/>
+          </a:prstGeom>
+          <a:noFill/>
+          <a:ln>
+            <a:noFill/>
+          </a:ln>
+        </p:spPr>
+      </p:pic>
+      <p:pic>
+        <p:nvPicPr>
+          <p:cNvPr id="79" name="Google Shape;79;p17"/>
+          <p:cNvPicPr preferRelativeResize="0"/>
+          <p:nvPr/>
+        </p:nvPicPr>
+        <p:blipFill>
+          <a:blip r:embed="rId4">
+            <a:alphaModFix/>
+          </a:blip>
+          <a:stretch>
+            <a:fillRect/>
+          </a:stretch>
+        </p:blipFill>
+        <p:spPr>
+          <a:xfrm>
+            <a:off x="152400" y="2110989"/>
+            <a:ext cx="8839199" cy="1557698"/>
+          </a:xfrm>
+          <a:prstGeom prst="rect">
+            <a:avLst/>
+          </a:prstGeom>
+          <a:noFill/>
+          <a:ln>
+            <a:noFill/>
+          </a:ln>
+        </p:spPr>
+      </p:pic>
+    </p:spTree>
+  </p:cSld>
+  <p:clrMapOvr>
+    <a:masterClrMapping/>
+  </p:clrMapOvr>
+</p:sld>
+</file>
+
+<file path=ppt/slides/slide6.xml><?xml version="1.0" encoding="utf-8"?>
+<p:sld xmlns:a="http://schemas.openxmlformats.org/drawingml/2006/main" xmlns:r="http://schemas.openxmlformats.org/officeDocument/2006/relationships" xmlns:mc="http://schemas.openxmlformats.org/markup-compatibility/2006" xmlns:mv="urn:schemas-microsoft-com:mac:vml" xmlns:p="http://schemas.openxmlformats.org/presentationml/2006/main" xmlns:c="http://schemas.openxmlformats.org/drawingml/2006/chart" xmlns:dgm="http://schemas.openxmlformats.org/drawingml/2006/diagram" xmlns:o="urn:schemas-microsoft-com:office:office" xmlns:v="urn:schemas-microsoft-com:vml" xmlns:pvml="urn:schemas-microsoft-com:office:powerpoint" xmlns:com="http://schemas.openxmlformats.org/drawingml/2006/compatibility" xmlns:p14="http://schemas.microsoft.com/office/powerpoint/2010/main" xmlns:p15="http://schemas.microsoft.com/office/powerpoint/2012/main" xmlns:ahyp="http://schemas.microsoft.com/office/drawing/2018/hyperlinkcolor">
+  <p:cSld>
+    <p:spTree>
+      <p:nvGrpSpPr>
+        <p:cNvPr id="83" name="Shape 83"/>
+        <p:cNvGrpSpPr/>
+        <p:nvPr/>
+      </p:nvGrpSpPr>
+      <p:grpSpPr>
+        <a:xfrm>
+          <a:off x="0" y="0"/>
+          <a:ext cx="0" cy="0"/>
+          <a:chOff x="0" y="0"/>
+          <a:chExt cx="0" cy="0"/>
+        </a:xfrm>
+      </p:grpSpPr>
+      <p:sp>
+        <p:nvSpPr>
+          <p:cNvPr id="84" name="Google Shape;84;p18"/>
+          <p:cNvSpPr txBox="1"/>
+          <p:nvPr>
             <p:ph type="title"/>
           </p:nvPr>
         </p:nvSpPr>
@@ -5958,7 +9353,7 @@
       </p:sp>
       <p:sp>
         <p:nvSpPr>
-          <p:cNvPr id="60" name="Google Shape;60;p14"/>
+          <p:cNvPr id="85" name="Google Shape;85;p18"/>
           <p:cNvSpPr txBox="1"/>
           <p:nvPr>
             <p:ph idx="1" type="body"/>
@@ -5975,7 +9370,7 @@
         </p:spPr>
         <p:txBody>
           <a:bodyPr anchorCtr="0" anchor="t" bIns="91425" lIns="91425" spcFirstLastPara="1" rIns="91425" wrap="square" tIns="91425">
-            <a:normAutofit/>
+            <a:normAutofit fontScale="70000" lnSpcReduction="10000"/>
           </a:bodyPr>
           <a:lstStyle/>
           <a:p>
@@ -5990,7 +9385,39 @@
             </a:pPr>
             <a:r>
               <a:rPr lang="en"/>
-              <a:t>Prediction: Model response</a:t>
+              <a:t>Prediction: Model response. TP out of TP+FP. For </a:t>
+            </a:r>
+            <a:r>
+              <a:rPr lang="en"/>
+              <a:t>unbalanced</a:t>
+            </a:r>
+            <a:r>
+              <a:rPr lang="en"/>
+              <a:t> dataset  </a:t>
+            </a:r>
+            <a:endParaRPr/>
+          </a:p>
+          <a:p>
+            <a:pPr indent="0" lvl="0" marL="0" rtl="0" algn="l">
+              <a:spcBef>
+                <a:spcPts val="1200"/>
+              </a:spcBef>
+              <a:spcAft>
+                <a:spcPts val="0"/>
+              </a:spcAft>
+              <a:buNone/>
+            </a:pPr>
+            <a:r>
+              <a:rPr lang="en"/>
+              <a:t>Recall: TP out of TP+FN. Useful for disease detection. FN to be kept low. This is for </a:t>
+            </a:r>
+            <a:r>
+              <a:rPr lang="en"/>
+              <a:t>unbalanced</a:t>
+            </a:r>
+            <a:r>
+              <a:rPr lang="en"/>
+              <a:t> data set.</a:t>
             </a:r>
             <a:endParaRPr/>
           </a:p>
@@ -6022,7 +9449,7 @@
             </a:pPr>
             <a:r>
               <a:rPr lang="en"/>
-              <a:t>Accuracy: How many predictions are correct.</a:t>
+              <a:t>Accuracy: How many predictions are correct. Accuracy is for balanced dataset.</a:t>
             </a:r>
             <a:endParaRPr/>
           </a:p>
@@ -6037,7 +9464,7 @@
               <a:buClr>
                 <a:schemeClr val="dk1"/>
               </a:buClr>
-              <a:buSzPts val="1100"/>
+              <a:buSzPct val="61111"/>
               <a:buFont typeface="Arial"/>
               <a:buNone/>
             </a:pPr>
@@ -6069,7 +9496,98 @@
               </a:rPr>
               <a:t> is the line or surface that separates different classes in a model’s feature space.</a:t>
             </a:r>
-            <a:endParaRPr/>
+            <a:endParaRPr>
+              <a:solidFill>
+                <a:schemeClr val="dk1"/>
+              </a:solidFill>
+            </a:endParaRPr>
+          </a:p>
+          <a:p>
+            <a:pPr indent="0" lvl="0" marL="0" rtl="0" algn="l">
+              <a:spcBef>
+                <a:spcPts val="1200"/>
+              </a:spcBef>
+              <a:spcAft>
+                <a:spcPts val="0"/>
+              </a:spcAft>
+              <a:buClr>
+                <a:schemeClr val="dk1"/>
+              </a:buClr>
+              <a:buSzPct val="61111"/>
+              <a:buFont typeface="Arial"/>
+              <a:buNone/>
+            </a:pPr>
+            <a:r>
+              <a:rPr lang="en">
+                <a:solidFill>
+                  <a:schemeClr val="dk1"/>
+                </a:solidFill>
+              </a:rPr>
+              <a:t>RMSE: This is an error matrix. To be kept low.</a:t>
+            </a:r>
+            <a:endParaRPr>
+              <a:solidFill>
+                <a:schemeClr val="dk1"/>
+              </a:solidFill>
+            </a:endParaRPr>
+          </a:p>
+          <a:p>
+            <a:pPr indent="0" lvl="0" marL="0" rtl="0" algn="l">
+              <a:spcBef>
+                <a:spcPts val="1200"/>
+              </a:spcBef>
+              <a:spcAft>
+                <a:spcPts val="0"/>
+              </a:spcAft>
+              <a:buClr>
+                <a:schemeClr val="dk1"/>
+              </a:buClr>
+              <a:buSzPct val="61111"/>
+              <a:buFont typeface="Arial"/>
+              <a:buNone/>
+            </a:pPr>
+            <a:r>
+              <a:rPr lang="en">
+                <a:solidFill>
+                  <a:schemeClr val="dk1"/>
+                </a:solidFill>
+              </a:rPr>
+              <a:t>R2 Square: Calculate Model efficiency. To be High.</a:t>
+            </a:r>
+            <a:endParaRPr>
+              <a:solidFill>
+                <a:schemeClr val="dk1"/>
+              </a:solidFill>
+            </a:endParaRPr>
+          </a:p>
+          <a:p>
+            <a:pPr indent="0" lvl="0" marL="0" rtl="0" algn="l">
+              <a:spcBef>
+                <a:spcPts val="1200"/>
+              </a:spcBef>
+              <a:spcAft>
+                <a:spcPts val="0"/>
+              </a:spcAft>
+              <a:buClr>
+                <a:schemeClr val="dk1"/>
+              </a:buClr>
+              <a:buSzPct val="61111"/>
+              <a:buFont typeface="Arial"/>
+              <a:buNone/>
+            </a:pPr>
+            <a:r>
+              <a:rPr lang="en">
+                <a:solidFill>
+                  <a:schemeClr val="dk1"/>
+                </a:solidFill>
+              </a:rPr>
+              <a:t>Hypothesis Testing: If there are less columns in a data set we go for hypothesis testing. </a:t>
+            </a:r>
+            <a:endParaRPr>
+              <a:solidFill>
+                <a:schemeClr val="dk1"/>
+              </a:solidFill>
+            </a:endParaRPr>
           </a:p>
           <a:p>
             <a:pPr indent="0" lvl="0" marL="0" rtl="0" algn="l">
@@ -6097,12 +9615,12 @@
 </p:sld>
 </file>
 
-<file path=ppt/slides/slide3.xml><?xml version="1.0" encoding="utf-8"?>
+<file path=ppt/slides/slide7.xml><?xml version="1.0" encoding="utf-8"?>
 <p:sld xmlns:a="http://schemas.openxmlformats.org/drawingml/2006/main" xmlns:r="http://schemas.openxmlformats.org/officeDocument/2006/relationships" xmlns:mc="http://schemas.openxmlformats.org/markup-compatibility/2006" xmlns:mv="urn:schemas-microsoft-com:mac:vml" xmlns:p="http://schemas.openxmlformats.org/presentationml/2006/main" xmlns:c="http://schemas.openxmlformats.org/drawingml/2006/chart" xmlns:dgm="http://schemas.openxmlformats.org/drawingml/2006/diagram" xmlns:o="urn:schemas-microsoft-com:office:office" xmlns:v="urn:schemas-microsoft-com:vml" xmlns:pvml="urn:schemas-microsoft-com:office:powerpoint" xmlns:com="http://schemas.openxmlformats.org/drawingml/2006/compatibility" xmlns:p14="http://schemas.microsoft.com/office/powerpoint/2010/main" xmlns:p15="http://schemas.microsoft.com/office/powerpoint/2012/main" xmlns:ahyp="http://schemas.microsoft.com/office/drawing/2018/hyperlinkcolor">
   <p:cSld>
     <p:spTree>
       <p:nvGrpSpPr>
-        <p:cNvPr id="64" name="Shape 64"/>
+        <p:cNvPr id="89" name="Shape 89"/>
         <p:cNvGrpSpPr/>
         <p:nvPr/>
       </p:nvGrpSpPr>
@@ -6116,7 +9634,7 @@
       </p:grpSpPr>
       <p:sp>
         <p:nvSpPr>
-          <p:cNvPr id="65" name="Google Shape;65;p15"/>
+          <p:cNvPr id="90" name="Google Shape;90;p19"/>
           <p:cNvSpPr txBox="1"/>
           <p:nvPr>
             <p:ph type="title"/>
@@ -6156,7 +9674,7 @@
       </p:sp>
       <p:sp>
         <p:nvSpPr>
-          <p:cNvPr id="66" name="Google Shape;66;p15"/>
+          <p:cNvPr id="91" name="Google Shape;91;p19"/>
           <p:cNvSpPr txBox="1"/>
           <p:nvPr>
             <p:ph idx="1" type="body"/>
@@ -6195,7 +9713,7 @@
       </p:sp>
       <p:pic>
         <p:nvPicPr>
-          <p:cNvPr id="67" name="Google Shape;67;p15"/>
+          <p:cNvPr id="92" name="Google Shape;92;p19"/>
           <p:cNvPicPr preferRelativeResize="0"/>
           <p:nvPr/>
         </p:nvPicPr>
@@ -6229,12 +9747,12 @@
 </p:sld>
 </file>
 
-<file path=ppt/slides/slide4.xml><?xml version="1.0" encoding="utf-8"?>
+<file path=ppt/slides/slide8.xml><?xml version="1.0" encoding="utf-8"?>
 <p:sld xmlns:a="http://schemas.openxmlformats.org/drawingml/2006/main" xmlns:r="http://schemas.openxmlformats.org/officeDocument/2006/relationships" xmlns:mc="http://schemas.openxmlformats.org/markup-compatibility/2006" xmlns:mv="urn:schemas-microsoft-com:mac:vml" xmlns:p="http://schemas.openxmlformats.org/presentationml/2006/main" xmlns:c="http://schemas.openxmlformats.org/drawingml/2006/chart" xmlns:dgm="http://schemas.openxmlformats.org/drawingml/2006/diagram" xmlns:o="urn:schemas-microsoft-com:office:office" xmlns:v="urn:schemas-microsoft-com:vml" xmlns:pvml="urn:schemas-microsoft-com:office:powerpoint" xmlns:com="http://schemas.openxmlformats.org/drawingml/2006/compatibility" xmlns:p14="http://schemas.microsoft.com/office/powerpoint/2010/main" xmlns:p15="http://schemas.microsoft.com/office/powerpoint/2012/main" xmlns:ahyp="http://schemas.microsoft.com/office/drawing/2018/hyperlinkcolor">
   <p:cSld>
     <p:spTree>
       <p:nvGrpSpPr>
-        <p:cNvPr id="71" name="Shape 71"/>
+        <p:cNvPr id="96" name="Shape 96"/>
         <p:cNvGrpSpPr/>
         <p:nvPr/>
       </p:nvGrpSpPr>
@@ -6248,7 +9766,7 @@
       </p:grpSpPr>
       <p:sp>
         <p:nvSpPr>
-          <p:cNvPr id="72" name="Google Shape;72;p16"/>
+          <p:cNvPr id="97" name="Google Shape;97;p20"/>
           <p:cNvSpPr txBox="1"/>
           <p:nvPr>
             <p:ph idx="1" type="body"/>
@@ -6287,7 +9805,7 @@
       </p:sp>
       <p:pic>
         <p:nvPicPr>
-          <p:cNvPr id="73" name="Google Shape;73;p16"/>
+          <p:cNvPr id="98" name="Google Shape;98;p20"/>
           <p:cNvPicPr preferRelativeResize="0"/>
           <p:nvPr/>
         </p:nvPicPr>
@@ -6321,12 +9839,12 @@
 </p:sld>
 </file>
 
-<file path=ppt/slides/slide5.xml><?xml version="1.0" encoding="utf-8"?>
+<file path=ppt/slides/slide9.xml><?xml version="1.0" encoding="utf-8"?>
 <p:sld xmlns:a="http://schemas.openxmlformats.org/drawingml/2006/main" xmlns:r="http://schemas.openxmlformats.org/officeDocument/2006/relationships" xmlns:mc="http://schemas.openxmlformats.org/markup-compatibility/2006" xmlns:mv="urn:schemas-microsoft-com:mac:vml" xmlns:p="http://schemas.openxmlformats.org/presentationml/2006/main" xmlns:c="http://schemas.openxmlformats.org/drawingml/2006/chart" xmlns:dgm="http://schemas.openxmlformats.org/drawingml/2006/diagram" xmlns:o="urn:schemas-microsoft-com:office:office" xmlns:v="urn:schemas-microsoft-com:vml" xmlns:pvml="urn:schemas-microsoft-com:office:powerpoint" xmlns:com="http://schemas.openxmlformats.org/drawingml/2006/compatibility" xmlns:p14="http://schemas.microsoft.com/office/powerpoint/2010/main" xmlns:p15="http://schemas.microsoft.com/office/powerpoint/2012/main" xmlns:ahyp="http://schemas.microsoft.com/office/drawing/2018/hyperlinkcolor">
   <p:cSld>
     <p:spTree>
       <p:nvGrpSpPr>
-        <p:cNvPr id="77" name="Shape 77"/>
+        <p:cNvPr id="102" name="Shape 102"/>
         <p:cNvGrpSpPr/>
         <p:nvPr/>
       </p:nvGrpSpPr>
@@ -6340,7 +9858,7 @@
       </p:grpSpPr>
       <p:sp>
         <p:nvSpPr>
-          <p:cNvPr id="78" name="Google Shape;78;p17"/>
+          <p:cNvPr id="103" name="Google Shape;103;p21"/>
           <p:cNvSpPr txBox="1"/>
           <p:nvPr>
             <p:ph idx="1" type="body"/>
@@ -6379,7 +9897,7 @@
       </p:sp>
       <p:pic>
         <p:nvPicPr>
-          <p:cNvPr id="79" name="Google Shape;79;p17"/>
+          <p:cNvPr id="104" name="Google Shape;104;p21"/>
           <p:cNvPicPr preferRelativeResize="0"/>
           <p:nvPr/>
         </p:nvPicPr>
